--- a/presentations/PF_L04_RecordVault_Lesson.pptx
+++ b/presentations/PF_L04_RecordVault_Lesson.pptx
@@ -19,9 +19,10 @@
     <p:sldId id="267" r:id="rId13"/>
     <p:sldId id="268" r:id="rId14"/>
     <p:sldId id="269" r:id="rId15"/>
+    <p:sldId id="270" r:id="rId16"/>
   </p:sldIdLst>
   <p:notesMasterIdLst>
-    <p:notesMasterId r:id="rId16"/>
+    <p:notesMasterId r:id="rId17"/>
   </p:notesMasterIdLst>
   <p:sldSz cx="12192000" cy="6858000"/>
   <p:notesSz cx="6858000" cy="12192000"/>
@@ -692,7 +693,13 @@
           <a:p>
             <a:r>
               <a:rPr lang="en-US" dirty="0"/>
-              <a:t>Make them commit to an answer on paper before they tap the star. Guessing first costs them the learning.</a:t>
+              <a:t>The answer is D: Runner Bean and Basil.
+Do not say it yet. Every pupil commits first - fingers, whiteboards or a show of hands on each letter in turn - and you count the split before anyone can change their mind.
+IF MOST OF THE CLASS IS RIGHT: say why it is right in one sentence and go straight on to the independent work.
+IF A SIGNIFICANT GROUP IS ON ONE WRONG LETTER: that option is the misconception to teach against before anyone goes on. Go back to station 4, WHERE, and work through its example again, aloud, with the class watching, then re-ask this question.
+The course's own response to a wrong answer here: Runner Bean has 3 packets and Basil has 0, and both of those are below 5.
+A limitation, stated rather than papered over: one response covers every wrong option; it does not say what to revisit for each one. The course does not record what each separate wrong option means, and this slide does not invent it. Decide your own reteach for each option before the lesson; the options above are the start of it.
+This is a real activity from the experience (pf-l04-s4-c1), so the wording here is the wording a pupil will see.</a:t>
             </a:r>
             <a:endParaRPr lang="en-US" dirty="0"/>
           </a:p>
@@ -780,7 +787,7 @@
           <a:p>
             <a:r>
               <a:rPr lang="en-US" dirty="0"/>
-              <a:t>Use these as a settler, or as something for early finishers to read in the experience.</a:t>
+              <a:t>Make them commit to an answer on paper before they tap the star. Guessing first costs them the learning.</a:t>
             </a:r>
             <a:endParaRPr lang="en-US" dirty="0"/>
           </a:p>
@@ -868,7 +875,7 @@
           <a:p>
             <a:r>
               <a:rPr lang="en-US" dirty="0"/>
-              <a:t>Timed and silent. Mark against the answer sheet, then ask students to record their weakest area.</a:t>
+              <a:t>Use these as a settler, or as something for early finishers to read in the experience.</a:t>
             </a:r>
             <a:endParaRPr lang="en-US" dirty="0"/>
           </a:p>
@@ -956,7 +963,7 @@
           <a:p>
             <a:r>
               <a:rPr lang="en-US" dirty="0"/>
-              <a:t>Students copy their score-screen breakdown onto the worksheet, then rate themselves here.</a:t>
+              <a:t>Timed and silent. Mark against the answer sheet, then ask students to record their weakest area.</a:t>
             </a:r>
             <a:endParaRPr lang="en-US" dirty="0"/>
           </a:p>
@@ -980,6 +987,94 @@
             <a:fld id="{F7021451-1387-4CA6-816F-3879F97B5CBC}" type="slidenum">
               <a:rPr lang="en-US"/>
               <a:t>14</a:t>
+            </a:fld>
+            <a:endParaRPr lang="en-US"/>
+          </a:p>
+        </p:txBody>
+      </p:sp>
+    </p:spTree>
+    <p:extLst>
+      <p:ext uri="{BB962C8B-B14F-4D97-AF65-F5344CB8AC3E}">
+        <p14:creationId xmlns:p14="http://schemas.microsoft.com/office/powerpoint/2010/main" val="1024086991"/>
+      </p:ext>
+    </p:extLst>
+  </p:cSld>
+  <p:clrMapOvr>
+    <a:masterClrMapping/>
+  </p:clrMapOvr>
+</p:notes>
+</file>
+
+<file path=ppt/notesSlides/notesSlide15.xml><?xml version="1.0" encoding="utf-8"?>
+<p:notes xmlns:a="http://schemas.openxmlformats.org/drawingml/2006/main" xmlns:r="http://schemas.openxmlformats.org/officeDocument/2006/relationships" xmlns:p="http://schemas.openxmlformats.org/presentationml/2006/main">
+  <p:cSld>
+    <p:spTree>
+      <p:nvGrpSpPr>
+        <p:cNvPr id="1" name=""/>
+        <p:cNvGrpSpPr/>
+        <p:nvPr/>
+      </p:nvGrpSpPr>
+      <p:grpSpPr>
+        <a:xfrm>
+          <a:off x="0" y="0"/>
+          <a:ext cx="0" cy="0"/>
+          <a:chOff x="0" y="0"/>
+          <a:chExt cx="0" cy="0"/>
+        </a:xfrm>
+      </p:grpSpPr>
+      <p:sp>
+        <p:nvSpPr>
+          <p:cNvPr id="2" name="Slide Image Placeholder 1"/>
+          <p:cNvSpPr>
+            <a:spLocks noGrp="1" noRot="1" noChangeAspect="1"/>
+          </p:cNvSpPr>
+          <p:nvPr>
+            <p:ph type="sldImg"/>
+          </p:nvPr>
+        </p:nvSpPr>
+        <p:spPr/>
+      </p:sp>
+      <p:sp>
+        <p:nvSpPr>
+          <p:cNvPr id="3" name="Notes Placeholder 2"/>
+          <p:cNvSpPr>
+            <a:spLocks noGrp="1"/>
+          </p:cNvSpPr>
+          <p:nvPr>
+            <p:ph type="body" idx="1"/>
+          </p:nvPr>
+        </p:nvSpPr>
+        <p:spPr/>
+        <p:txBody>
+          <a:bodyPr/>
+          <a:lstStyle/>
+          <a:p>
+            <a:r>
+              <a:rPr lang="en-US" dirty="0"/>
+              <a:t>Students copy their score-screen breakdown onto the worksheet, then rate themselves here.</a:t>
+            </a:r>
+            <a:endParaRPr lang="en-US" dirty="0"/>
+          </a:p>
+        </p:txBody>
+      </p:sp>
+      <p:sp>
+        <p:nvSpPr>
+          <p:cNvPr id="4" name="Slide Number Placeholder 3"/>
+          <p:cNvSpPr>
+            <a:spLocks noGrp="1"/>
+          </p:cNvSpPr>
+          <p:nvPr>
+            <p:ph type="sldNum" sz="quarter" idx="10"/>
+          </p:nvPr>
+        </p:nvSpPr>
+        <p:spPr/>
+        <p:txBody>
+          <a:bodyPr/>
+          <a:lstStyle/>
+          <a:p>
+            <a:fld id="{F7021451-1387-4CA6-816F-3879F97B5CBC}" type="slidenum">
+              <a:rPr lang="en-US"/>
+              <a:t>15</a:t>
             </a:fld>
             <a:endParaRPr lang="en-US"/>
           </a:p>
@@ -2949,12 +3044,12 @@
         </p:nvSpPr>
         <p:spPr>
           <a:xfrm>
-            <a:off x="502920" y="438912"/>
-            <a:ext cx="3108960" cy="502920"/>
+            <a:off x="502920" y="457200"/>
+            <a:ext cx="1051560" cy="420624"/>
           </a:xfrm>
           <a:prstGeom prst="roundRect">
             <a:avLst>
-              <a:gd name="adj" fmla="val 18182"/>
+              <a:gd name="adj" fmla="val 21739"/>
             </a:avLst>
           </a:prstGeom>
           <a:solidFill>
@@ -2971,8 +3066,8 @@
         </p:nvSpPr>
         <p:spPr>
           <a:xfrm>
-            <a:off x="502920" y="438912"/>
-            <a:ext cx="3108960" cy="502920"/>
+            <a:off x="502920" y="457200"/>
+            <a:ext cx="1051560" cy="420624"/>
           </a:xfrm>
           <a:prstGeom prst="rect">
             <a:avLst/>
@@ -2988,7 +3083,7 @@
               <a:buNone/>
             </a:pPr>
             <a:r>
-              <a:rPr lang="en-US" sz="1300" b="1" dirty="0">
+              <a:rPr lang="en-US" sz="1200" b="1" dirty="0">
                 <a:solidFill>
                   <a:srgbClr val="101828"/>
                 </a:solidFill>
@@ -2996,9 +3091,9 @@
                 <a:ea typeface="IBM Plex Mono" pitchFamily="34" charset="-122"/>
                 <a:cs typeface="IBM Plex Mono" pitchFamily="34" charset="-120"/>
               </a:rPr>
-              <a:t>★  FINAL CHALLENGE</a:t>
-            </a:r>
-            <a:endParaRPr lang="en-US" sz="1300" dirty="0"/>
+              <a:t>CHECK</a:t>
+            </a:r>
+            <a:endParaRPr lang="en-US" sz="1200" dirty="0"/>
           </a:p>
         </p:txBody>
       </p:sp>
@@ -3010,8 +3105,8 @@
         </p:nvSpPr>
         <p:spPr>
           <a:xfrm>
-            <a:off x="502920" y="1097280"/>
-            <a:ext cx="11155680" cy="731520"/>
+            <a:off x="1737360" y="457200"/>
+            <a:ext cx="9875520" cy="420624"/>
           </a:xfrm>
           <a:prstGeom prst="rect">
             <a:avLst/>
@@ -3027,34 +3122,76 @@
               <a:buNone/>
             </a:pPr>
             <a:r>
-              <a:rPr lang="en-US" sz="3400" b="1" dirty="0">
-                <a:solidFill>
-                  <a:srgbClr val="101828"/>
+              <a:rPr lang="en-US" sz="1500" dirty="0">
+                <a:solidFill>
+                  <a:srgbClr val="667085"/>
                 </a:solidFill>
                 <a:latin typeface="IBM Plex Sans" pitchFamily="34" charset="0"/>
                 <a:ea typeface="IBM Plex Sans" pitchFamily="34" charset="-122"/>
                 <a:cs typeface="IBM Plex Sans" pitchFamily="34" charset="-120"/>
               </a:rPr>
-              <a:t>Run the query</a:t>
-            </a:r>
-            <a:endParaRPr lang="en-US" sz="3400" dirty="0"/>
-          </a:p>
-        </p:txBody>
-      </p:sp>
-      <p:sp>
-        <p:nvSpPr>
-          <p:cNvPr id="8" name="Shape 6"/>
+              <a:t>Hands down. Everyone commits.</a:t>
+            </a:r>
+            <a:endParaRPr lang="en-US" sz="1500" dirty="0"/>
+          </a:p>
+        </p:txBody>
+      </p:sp>
+      <p:sp>
+        <p:nvSpPr>
+          <p:cNvPr id="8" name="Text 6"/>
+          <p:cNvSpPr txBox="1"/>
+          <p:nvPr/>
+        </p:nvSpPr>
+        <p:spPr>
+          <a:xfrm>
+            <a:off x="502920" y="1097280"/>
+            <a:ext cx="11155680" cy="914400"/>
+          </a:xfrm>
+          <a:prstGeom prst="rect">
+            <a:avLst/>
+          </a:prstGeom>
+          <a:noFill/>
+          <a:ln/>
+        </p:spPr>
+        <p:txBody>
+          <a:bodyPr wrap="square" lIns="0" tIns="0" rIns="0" bIns="0" rtlCol="0" anchor="ctr"/>
+          <a:lstStyle/>
+          <a:p>
+            <a:pPr indent="0" marL="0">
+              <a:lnSpc>
+                <a:spcPct val="115000"/>
+              </a:lnSpc>
+              <a:buNone/>
+            </a:pPr>
+            <a:r>
+              <a:rPr lang="en-US" sz="2600" b="1" dirty="0">
+                <a:solidFill>
+                  <a:srgbClr val="101828"/>
+                </a:solidFill>
+                <a:latin typeface="IBM Plex Sans" pitchFamily="34" charset="0"/>
+                <a:ea typeface="IBM Plex Sans" pitchFamily="34" charset="-122"/>
+                <a:cs typeface="IBM Plex Sans" pitchFamily="34" charset="-120"/>
+              </a:rPr>
+              <a:t>Using the Seeds table, which records does  WHERE PacketsLeft &lt; 5  return?</a:t>
+            </a:r>
+            <a:endParaRPr lang="en-US" sz="2600" dirty="0"/>
+          </a:p>
+        </p:txBody>
+      </p:sp>
+      <p:sp>
+        <p:nvSpPr>
+          <p:cNvPr id="9" name="Shape 7"/>
           <p:cNvSpPr/>
           <p:nvPr/>
         </p:nvSpPr>
         <p:spPr>
           <a:xfrm>
-            <a:off x="502920" y="2011680"/>
-            <a:ext cx="11155680" cy="2194560"/>
+            <a:off x="502920" y="2148840"/>
+            <a:ext cx="11155680" cy="731520"/>
           </a:xfrm>
           <a:prstGeom prst="roundRect">
             <a:avLst>
-              <a:gd name="adj" fmla="val 5000"/>
+              <a:gd name="adj" fmla="val 15000"/>
             </a:avLst>
           </a:prstGeom>
           <a:solidFill>
@@ -3062,7 +3199,7 @@
           </a:solidFill>
           <a:ln w="15875">
             <a:solidFill>
-              <a:srgbClr val="2D63FF"/>
+              <a:srgbClr val="D9DEE7"/>
             </a:solidFill>
             <a:prstDash val="solid"/>
           </a:ln>
@@ -3070,14 +3207,75 @@
       </p:sp>
       <p:sp>
         <p:nvSpPr>
-          <p:cNvPr id="9" name="Text 7"/>
-          <p:cNvSpPr txBox="1"/>
-          <p:nvPr/>
-        </p:nvSpPr>
-        <p:spPr>
-          <a:xfrm>
-            <a:off x="1005840" y="2331720"/>
-            <a:ext cx="10149840" cy="1554480"/>
+          <p:cNvPr id="10" name="Shape 8"/>
+          <p:cNvSpPr/>
+          <p:nvPr/>
+        </p:nvSpPr>
+        <p:spPr>
+          <a:xfrm>
+            <a:off x="777240" y="2295144"/>
+            <a:ext cx="438912" cy="438912"/>
+          </a:xfrm>
+          <a:prstGeom prst="roundRect">
+            <a:avLst>
+              <a:gd name="adj" fmla="val 20833"/>
+            </a:avLst>
+          </a:prstGeom>
+          <a:solidFill>
+            <a:srgbClr val="EEF2FB"/>
+          </a:solidFill>
+          <a:ln/>
+        </p:spPr>
+      </p:sp>
+      <p:sp>
+        <p:nvSpPr>
+          <p:cNvPr id="11" name="Text 9"/>
+          <p:cNvSpPr txBox="1"/>
+          <p:nvPr/>
+        </p:nvSpPr>
+        <p:spPr>
+          <a:xfrm>
+            <a:off x="777240" y="2295144"/>
+            <a:ext cx="438912" cy="438912"/>
+          </a:xfrm>
+          <a:prstGeom prst="rect">
+            <a:avLst/>
+          </a:prstGeom>
+          <a:noFill/>
+          <a:ln/>
+        </p:spPr>
+        <p:txBody>
+          <a:bodyPr wrap="square" lIns="0" tIns="0" rIns="0" bIns="0" rtlCol="0" anchor="ctr"/>
+          <a:lstStyle/>
+          <a:p>
+            <a:pPr algn="ctr" indent="0" marL="0">
+              <a:buNone/>
+            </a:pPr>
+            <a:r>
+              <a:rPr lang="en-US" sz="1300" b="1" dirty="0">
+                <a:solidFill>
+                  <a:srgbClr val="2D63FF"/>
+                </a:solidFill>
+                <a:latin typeface="IBM Plex Mono" pitchFamily="34" charset="0"/>
+                <a:ea typeface="IBM Plex Mono" pitchFamily="34" charset="-122"/>
+                <a:cs typeface="IBM Plex Mono" pitchFamily="34" charset="-120"/>
+              </a:rPr>
+              <a:t>A</a:t>
+            </a:r>
+            <a:endParaRPr lang="en-US" sz="1300" dirty="0"/>
+          </a:p>
+        </p:txBody>
+      </p:sp>
+      <p:sp>
+        <p:nvSpPr>
+          <p:cNvPr id="12" name="Text 10"/>
+          <p:cNvSpPr txBox="1"/>
+          <p:nvPr/>
+        </p:nvSpPr>
+        <p:spPr>
+          <a:xfrm>
+            <a:off x="1417320" y="2148840"/>
+            <a:ext cx="10058400" cy="731520"/>
           </a:xfrm>
           <a:prstGeom prst="rect">
             <a:avLst/>
@@ -3091,12 +3289,12 @@
           <a:p>
             <a:pPr indent="0" marL="0">
               <a:lnSpc>
-                <a:spcPct val="130000"/>
+                <a:spcPct val="115000"/>
               </a:lnSpc>
               <a:buNone/>
             </a:pPr>
             <a:r>
-              <a:rPr lang="en-US" sz="2200" dirty="0">
+              <a:rPr lang="en-US" sz="1700" dirty="0">
                 <a:solidFill>
                   <a:srgbClr val="101828"/>
                 </a:solidFill>
@@ -3104,22 +3302,110 @@
                 <a:ea typeface="IBM Plex Sans" pitchFamily="34" charset="-122"/>
                 <a:cs typeface="IBM Plex Sans" pitchFamily="34" charset="-120"/>
               </a:rPr>
-              <a:t>Six queries on the Seeds table, all beginning SELECT Name FROM Seeds. Tap the star, work through the table row by row, then match each WHERE line to the records it returns.</a:t>
-            </a:r>
-            <a:endParaRPr lang="en-US" sz="2200" dirty="0"/>
-          </a:p>
-        </p:txBody>
-      </p:sp>
-      <p:sp>
-        <p:nvSpPr>
-          <p:cNvPr id="10" name="Text 8"/>
-          <p:cNvSpPr txBox="1"/>
-          <p:nvPr/>
-        </p:nvSpPr>
-        <p:spPr>
-          <a:xfrm>
-            <a:off x="502920" y="4526280"/>
-            <a:ext cx="11155680" cy="457200"/>
+              <a:t>Basil only</a:t>
+            </a:r>
+            <a:endParaRPr lang="en-US" sz="1700" dirty="0"/>
+          </a:p>
+        </p:txBody>
+      </p:sp>
+      <p:sp>
+        <p:nvSpPr>
+          <p:cNvPr id="13" name="Shape 11"/>
+          <p:cNvSpPr/>
+          <p:nvPr/>
+        </p:nvSpPr>
+        <p:spPr>
+          <a:xfrm>
+            <a:off x="502920" y="3017520"/>
+            <a:ext cx="11155680" cy="731520"/>
+          </a:xfrm>
+          <a:prstGeom prst="roundRect">
+            <a:avLst>
+              <a:gd name="adj" fmla="val 15000"/>
+            </a:avLst>
+          </a:prstGeom>
+          <a:solidFill>
+            <a:srgbClr val="FFFFFF"/>
+          </a:solidFill>
+          <a:ln w="15875">
+            <a:solidFill>
+              <a:srgbClr val="D9DEE7"/>
+            </a:solidFill>
+            <a:prstDash val="solid"/>
+          </a:ln>
+        </p:spPr>
+      </p:sp>
+      <p:sp>
+        <p:nvSpPr>
+          <p:cNvPr id="14" name="Shape 12"/>
+          <p:cNvSpPr/>
+          <p:nvPr/>
+        </p:nvSpPr>
+        <p:spPr>
+          <a:xfrm>
+            <a:off x="777240" y="3163824"/>
+            <a:ext cx="438912" cy="438912"/>
+          </a:xfrm>
+          <a:prstGeom prst="roundRect">
+            <a:avLst>
+              <a:gd name="adj" fmla="val 20833"/>
+            </a:avLst>
+          </a:prstGeom>
+          <a:solidFill>
+            <a:srgbClr val="EEF2FB"/>
+          </a:solidFill>
+          <a:ln/>
+        </p:spPr>
+      </p:sp>
+      <p:sp>
+        <p:nvSpPr>
+          <p:cNvPr id="15" name="Text 13"/>
+          <p:cNvSpPr txBox="1"/>
+          <p:nvPr/>
+        </p:nvSpPr>
+        <p:spPr>
+          <a:xfrm>
+            <a:off x="777240" y="3163824"/>
+            <a:ext cx="438912" cy="438912"/>
+          </a:xfrm>
+          <a:prstGeom prst="rect">
+            <a:avLst/>
+          </a:prstGeom>
+          <a:noFill/>
+          <a:ln/>
+        </p:spPr>
+        <p:txBody>
+          <a:bodyPr wrap="square" lIns="0" tIns="0" rIns="0" bIns="0" rtlCol="0" anchor="ctr"/>
+          <a:lstStyle/>
+          <a:p>
+            <a:pPr algn="ctr" indent="0" marL="0">
+              <a:buNone/>
+            </a:pPr>
+            <a:r>
+              <a:rPr lang="en-US" sz="1300" b="1" dirty="0">
+                <a:solidFill>
+                  <a:srgbClr val="2D63FF"/>
+                </a:solidFill>
+                <a:latin typeface="IBM Plex Mono" pitchFamily="34" charset="0"/>
+                <a:ea typeface="IBM Plex Mono" pitchFamily="34" charset="-122"/>
+                <a:cs typeface="IBM Plex Mono" pitchFamily="34" charset="-120"/>
+              </a:rPr>
+              <a:t>B</a:t>
+            </a:r>
+            <a:endParaRPr lang="en-US" sz="1300" dirty="0"/>
+          </a:p>
+        </p:txBody>
+      </p:sp>
+      <p:sp>
+        <p:nvSpPr>
+          <p:cNvPr id="16" name="Text 14"/>
+          <p:cNvSpPr txBox="1"/>
+          <p:nvPr/>
+        </p:nvSpPr>
+        <p:spPr>
+          <a:xfrm>
+            <a:off x="1417320" y="3017520"/>
+            <a:ext cx="10058400" cy="731520"/>
           </a:xfrm>
           <a:prstGeom prst="rect">
             <a:avLst/>
@@ -3132,20 +3418,283 @@
           <a:lstStyle/>
           <a:p>
             <a:pPr indent="0" marL="0">
-              <a:buNone/>
-            </a:pPr>
-            <a:r>
-              <a:rPr lang="en-US" sz="1600" dirty="0">
-                <a:solidFill>
-                  <a:srgbClr val="667085"/>
+              <a:lnSpc>
+                <a:spcPct val="115000"/>
+              </a:lnSpc>
+              <a:buNone/>
+            </a:pPr>
+            <a:r>
+              <a:rPr lang="en-US" sz="1700" dirty="0">
+                <a:solidFill>
+                  <a:srgbClr val="101828"/>
                 </a:solidFill>
                 <a:latin typeface="IBM Plex Sans" pitchFamily="34" charset="0"/>
                 <a:ea typeface="IBM Plex Sans" pitchFamily="34" charset="-122"/>
                 <a:cs typeface="IBM Plex Sans" pitchFamily="34" charset="-120"/>
               </a:rPr>
-              <a:t>Predict on paper first, then look down and test it.</a:t>
-            </a:r>
-            <a:endParaRPr lang="en-US" sz="1600" dirty="0"/>
+              <a:t>Radish and Sunflower</a:t>
+            </a:r>
+            <a:endParaRPr lang="en-US" sz="1700" dirty="0"/>
+          </a:p>
+        </p:txBody>
+      </p:sp>
+      <p:sp>
+        <p:nvSpPr>
+          <p:cNvPr id="17" name="Shape 15"/>
+          <p:cNvSpPr/>
+          <p:nvPr/>
+        </p:nvSpPr>
+        <p:spPr>
+          <a:xfrm>
+            <a:off x="502920" y="3886200"/>
+            <a:ext cx="11155680" cy="731520"/>
+          </a:xfrm>
+          <a:prstGeom prst="roundRect">
+            <a:avLst>
+              <a:gd name="adj" fmla="val 15000"/>
+            </a:avLst>
+          </a:prstGeom>
+          <a:solidFill>
+            <a:srgbClr val="FFFFFF"/>
+          </a:solidFill>
+          <a:ln w="15875">
+            <a:solidFill>
+              <a:srgbClr val="D9DEE7"/>
+            </a:solidFill>
+            <a:prstDash val="solid"/>
+          </a:ln>
+        </p:spPr>
+      </p:sp>
+      <p:sp>
+        <p:nvSpPr>
+          <p:cNvPr id="18" name="Shape 16"/>
+          <p:cNvSpPr/>
+          <p:nvPr/>
+        </p:nvSpPr>
+        <p:spPr>
+          <a:xfrm>
+            <a:off x="777240" y="4032504"/>
+            <a:ext cx="438912" cy="438912"/>
+          </a:xfrm>
+          <a:prstGeom prst="roundRect">
+            <a:avLst>
+              <a:gd name="adj" fmla="val 20833"/>
+            </a:avLst>
+          </a:prstGeom>
+          <a:solidFill>
+            <a:srgbClr val="EEF2FB"/>
+          </a:solidFill>
+          <a:ln/>
+        </p:spPr>
+      </p:sp>
+      <p:sp>
+        <p:nvSpPr>
+          <p:cNvPr id="19" name="Text 17"/>
+          <p:cNvSpPr txBox="1"/>
+          <p:nvPr/>
+        </p:nvSpPr>
+        <p:spPr>
+          <a:xfrm>
+            <a:off x="777240" y="4032504"/>
+            <a:ext cx="438912" cy="438912"/>
+          </a:xfrm>
+          <a:prstGeom prst="rect">
+            <a:avLst/>
+          </a:prstGeom>
+          <a:noFill/>
+          <a:ln/>
+        </p:spPr>
+        <p:txBody>
+          <a:bodyPr wrap="square" lIns="0" tIns="0" rIns="0" bIns="0" rtlCol="0" anchor="ctr"/>
+          <a:lstStyle/>
+          <a:p>
+            <a:pPr algn="ctr" indent="0" marL="0">
+              <a:buNone/>
+            </a:pPr>
+            <a:r>
+              <a:rPr lang="en-US" sz="1300" b="1" dirty="0">
+                <a:solidFill>
+                  <a:srgbClr val="2D63FF"/>
+                </a:solidFill>
+                <a:latin typeface="IBM Plex Mono" pitchFamily="34" charset="0"/>
+                <a:ea typeface="IBM Plex Mono" pitchFamily="34" charset="-122"/>
+                <a:cs typeface="IBM Plex Mono" pitchFamily="34" charset="-120"/>
+              </a:rPr>
+              <a:t>C</a:t>
+            </a:r>
+            <a:endParaRPr lang="en-US" sz="1300" dirty="0"/>
+          </a:p>
+        </p:txBody>
+      </p:sp>
+      <p:sp>
+        <p:nvSpPr>
+          <p:cNvPr id="20" name="Text 18"/>
+          <p:cNvSpPr txBox="1"/>
+          <p:nvPr/>
+        </p:nvSpPr>
+        <p:spPr>
+          <a:xfrm>
+            <a:off x="1417320" y="3886200"/>
+            <a:ext cx="10058400" cy="731520"/>
+          </a:xfrm>
+          <a:prstGeom prst="rect">
+            <a:avLst/>
+          </a:prstGeom>
+          <a:noFill/>
+          <a:ln/>
+        </p:spPr>
+        <p:txBody>
+          <a:bodyPr wrap="square" lIns="0" tIns="0" rIns="0" bIns="0" rtlCol="0" anchor="ctr"/>
+          <a:lstStyle/>
+          <a:p>
+            <a:pPr indent="0" marL="0">
+              <a:lnSpc>
+                <a:spcPct val="115000"/>
+              </a:lnSpc>
+              <a:buNone/>
+            </a:pPr>
+            <a:r>
+              <a:rPr lang="en-US" sz="1700" dirty="0">
+                <a:solidFill>
+                  <a:srgbClr val="101828"/>
+                </a:solidFill>
+                <a:latin typeface="IBM Plex Sans" pitchFamily="34" charset="0"/>
+                <a:ea typeface="IBM Plex Sans" pitchFamily="34" charset="-122"/>
+                <a:cs typeface="IBM Plex Sans" pitchFamily="34" charset="-120"/>
+              </a:rPr>
+              <a:t>Every record in the table</a:t>
+            </a:r>
+            <a:endParaRPr lang="en-US" sz="1700" dirty="0"/>
+          </a:p>
+        </p:txBody>
+      </p:sp>
+      <p:sp>
+        <p:nvSpPr>
+          <p:cNvPr id="21" name="Shape 19"/>
+          <p:cNvSpPr/>
+          <p:nvPr/>
+        </p:nvSpPr>
+        <p:spPr>
+          <a:xfrm>
+            <a:off x="502920" y="4754880"/>
+            <a:ext cx="11155680" cy="731520"/>
+          </a:xfrm>
+          <a:prstGeom prst="roundRect">
+            <a:avLst>
+              <a:gd name="adj" fmla="val 15000"/>
+            </a:avLst>
+          </a:prstGeom>
+          <a:solidFill>
+            <a:srgbClr val="FFFFFF"/>
+          </a:solidFill>
+          <a:ln w="15875">
+            <a:solidFill>
+              <a:srgbClr val="D9DEE7"/>
+            </a:solidFill>
+            <a:prstDash val="solid"/>
+          </a:ln>
+        </p:spPr>
+      </p:sp>
+      <p:sp>
+        <p:nvSpPr>
+          <p:cNvPr id="22" name="Shape 20"/>
+          <p:cNvSpPr/>
+          <p:nvPr/>
+        </p:nvSpPr>
+        <p:spPr>
+          <a:xfrm>
+            <a:off x="777240" y="4901184"/>
+            <a:ext cx="438912" cy="438912"/>
+          </a:xfrm>
+          <a:prstGeom prst="roundRect">
+            <a:avLst>
+              <a:gd name="adj" fmla="val 20833"/>
+            </a:avLst>
+          </a:prstGeom>
+          <a:solidFill>
+            <a:srgbClr val="EEF2FB"/>
+          </a:solidFill>
+          <a:ln/>
+        </p:spPr>
+      </p:sp>
+      <p:sp>
+        <p:nvSpPr>
+          <p:cNvPr id="23" name="Text 21"/>
+          <p:cNvSpPr txBox="1"/>
+          <p:nvPr/>
+        </p:nvSpPr>
+        <p:spPr>
+          <a:xfrm>
+            <a:off x="777240" y="4901184"/>
+            <a:ext cx="438912" cy="438912"/>
+          </a:xfrm>
+          <a:prstGeom prst="rect">
+            <a:avLst/>
+          </a:prstGeom>
+          <a:noFill/>
+          <a:ln/>
+        </p:spPr>
+        <p:txBody>
+          <a:bodyPr wrap="square" lIns="0" tIns="0" rIns="0" bIns="0" rtlCol="0" anchor="ctr"/>
+          <a:lstStyle/>
+          <a:p>
+            <a:pPr algn="ctr" indent="0" marL="0">
+              <a:buNone/>
+            </a:pPr>
+            <a:r>
+              <a:rPr lang="en-US" sz="1300" b="1" dirty="0">
+                <a:solidFill>
+                  <a:srgbClr val="2D63FF"/>
+                </a:solidFill>
+                <a:latin typeface="IBM Plex Mono" pitchFamily="34" charset="0"/>
+                <a:ea typeface="IBM Plex Mono" pitchFamily="34" charset="-122"/>
+                <a:cs typeface="IBM Plex Mono" pitchFamily="34" charset="-120"/>
+              </a:rPr>
+              <a:t>D</a:t>
+            </a:r>
+            <a:endParaRPr lang="en-US" sz="1300" dirty="0"/>
+          </a:p>
+        </p:txBody>
+      </p:sp>
+      <p:sp>
+        <p:nvSpPr>
+          <p:cNvPr id="24" name="Text 22"/>
+          <p:cNvSpPr txBox="1"/>
+          <p:nvPr/>
+        </p:nvSpPr>
+        <p:spPr>
+          <a:xfrm>
+            <a:off x="1417320" y="4754880"/>
+            <a:ext cx="10058400" cy="731520"/>
+          </a:xfrm>
+          <a:prstGeom prst="rect">
+            <a:avLst/>
+          </a:prstGeom>
+          <a:noFill/>
+          <a:ln/>
+        </p:spPr>
+        <p:txBody>
+          <a:bodyPr wrap="square" lIns="0" tIns="0" rIns="0" bIns="0" rtlCol="0" anchor="ctr"/>
+          <a:lstStyle/>
+          <a:p>
+            <a:pPr indent="0" marL="0">
+              <a:lnSpc>
+                <a:spcPct val="115000"/>
+              </a:lnSpc>
+              <a:buNone/>
+            </a:pPr>
+            <a:r>
+              <a:rPr lang="en-US" sz="1700" dirty="0">
+                <a:solidFill>
+                  <a:srgbClr val="101828"/>
+                </a:solidFill>
+                <a:latin typeface="IBM Plex Sans" pitchFamily="34" charset="0"/>
+                <a:ea typeface="IBM Plex Sans" pitchFamily="34" charset="-122"/>
+                <a:cs typeface="IBM Plex Sans" pitchFamily="34" charset="-120"/>
+              </a:rPr>
+              <a:t>Runner Bean and Basil</a:t>
+            </a:r>
+            <a:endParaRPr lang="en-US" sz="1700" dirty="0"/>
           </a:p>
         </p:txBody>
       </p:sp>
@@ -3281,14 +3830,75 @@
       </p:sp>
       <p:sp>
         <p:nvSpPr>
-          <p:cNvPr id="5" name="Text 3"/>
-          <p:cNvSpPr txBox="1"/>
-          <p:nvPr/>
-        </p:nvSpPr>
-        <p:spPr>
-          <a:xfrm>
-            <a:off x="502920" y="411480"/>
-            <a:ext cx="11155680" cy="777240"/>
+          <p:cNvPr id="5" name="Shape 3"/>
+          <p:cNvSpPr/>
+          <p:nvPr/>
+        </p:nvSpPr>
+        <p:spPr>
+          <a:xfrm>
+            <a:off x="502920" y="438912"/>
+            <a:ext cx="3108960" cy="502920"/>
+          </a:xfrm>
+          <a:prstGeom prst="roundRect">
+            <a:avLst>
+              <a:gd name="adj" fmla="val 18182"/>
+            </a:avLst>
+          </a:prstGeom>
+          <a:solidFill>
+            <a:srgbClr val="F4B942"/>
+          </a:solidFill>
+          <a:ln/>
+        </p:spPr>
+      </p:sp>
+      <p:sp>
+        <p:nvSpPr>
+          <p:cNvPr id="6" name="Text 4"/>
+          <p:cNvSpPr txBox="1"/>
+          <p:nvPr/>
+        </p:nvSpPr>
+        <p:spPr>
+          <a:xfrm>
+            <a:off x="502920" y="438912"/>
+            <a:ext cx="3108960" cy="502920"/>
+          </a:xfrm>
+          <a:prstGeom prst="rect">
+            <a:avLst/>
+          </a:prstGeom>
+          <a:noFill/>
+          <a:ln/>
+        </p:spPr>
+        <p:txBody>
+          <a:bodyPr wrap="square" lIns="0" tIns="0" rIns="0" bIns="0" rtlCol="0" anchor="ctr"/>
+          <a:lstStyle/>
+          <a:p>
+            <a:pPr algn="ctr" indent="0" marL="0">
+              <a:buNone/>
+            </a:pPr>
+            <a:r>
+              <a:rPr lang="en-US" sz="1300" b="1" dirty="0">
+                <a:solidFill>
+                  <a:srgbClr val="101828"/>
+                </a:solidFill>
+                <a:latin typeface="IBM Plex Mono" pitchFamily="34" charset="0"/>
+                <a:ea typeface="IBM Plex Mono" pitchFamily="34" charset="-122"/>
+                <a:cs typeface="IBM Plex Mono" pitchFamily="34" charset="-120"/>
+              </a:rPr>
+              <a:t>★  FINAL CHALLENGE</a:t>
+            </a:r>
+            <a:endParaRPr lang="en-US" sz="1300" dirty="0"/>
+          </a:p>
+        </p:txBody>
+      </p:sp>
+      <p:sp>
+        <p:nvSpPr>
+          <p:cNvPr id="7" name="Text 5"/>
+          <p:cNvSpPr txBox="1"/>
+          <p:nvPr/>
+        </p:nvSpPr>
+        <p:spPr>
+          <a:xfrm>
+            <a:off x="502920" y="1097280"/>
+            <a:ext cx="11155680" cy="731520"/>
           </a:xfrm>
           <a:prstGeom prst="rect">
             <a:avLst/>
@@ -3304,7 +3914,7 @@
               <a:buNone/>
             </a:pPr>
             <a:r>
-              <a:rPr lang="en-US" sz="3200" b="1" dirty="0">
+              <a:rPr lang="en-US" sz="3400" b="1" dirty="0">
                 <a:solidFill>
                   <a:srgbClr val="101828"/>
                 </a:solidFill>
@@ -3312,65 +3922,26 @@
                 <a:ea typeface="IBM Plex Sans" pitchFamily="34" charset="-122"/>
                 <a:cs typeface="IBM Plex Sans" pitchFamily="34" charset="-120"/>
               </a:rPr>
-              <a:t>Worth knowing</a:t>
-            </a:r>
-            <a:endParaRPr lang="en-US" sz="3200" dirty="0"/>
-          </a:p>
-        </p:txBody>
-      </p:sp>
-      <p:sp>
-        <p:nvSpPr>
-          <p:cNvPr id="6" name="Text 4"/>
-          <p:cNvSpPr txBox="1"/>
-          <p:nvPr/>
-        </p:nvSpPr>
-        <p:spPr>
-          <a:xfrm>
-            <a:off x="502920" y="1170432"/>
-            <a:ext cx="11155680" cy="411480"/>
-          </a:xfrm>
-          <a:prstGeom prst="rect">
-            <a:avLst/>
-          </a:prstGeom>
-          <a:noFill/>
-          <a:ln/>
-        </p:spPr>
-        <p:txBody>
-          <a:bodyPr wrap="square" lIns="0" tIns="0" rIns="0" bIns="0" rtlCol="0" anchor="ctr"/>
-          <a:lstStyle/>
-          <a:p>
-            <a:pPr indent="0" marL="0">
-              <a:buNone/>
-            </a:pPr>
-            <a:r>
-              <a:rPr lang="en-US" sz="1500" dirty="0">
-                <a:solidFill>
-                  <a:srgbClr val="667085"/>
-                </a:solidFill>
-                <a:latin typeface="IBM Plex Sans" pitchFamily="34" charset="0"/>
-                <a:ea typeface="IBM Plex Sans" pitchFamily="34" charset="-122"/>
-                <a:cs typeface="IBM Plex Sans" pitchFamily="34" charset="-120"/>
-              </a:rPr>
-              <a:t>The information markers dotted around the room</a:t>
-            </a:r>
-            <a:endParaRPr lang="en-US" sz="1500" dirty="0"/>
-          </a:p>
-        </p:txBody>
-      </p:sp>
-      <p:sp>
-        <p:nvSpPr>
-          <p:cNvPr id="7" name="Shape 5"/>
+              <a:t>Run the query</a:t>
+            </a:r>
+            <a:endParaRPr lang="en-US" sz="3400" dirty="0"/>
+          </a:p>
+        </p:txBody>
+      </p:sp>
+      <p:sp>
+        <p:nvSpPr>
+          <p:cNvPr id="8" name="Shape 6"/>
           <p:cNvSpPr/>
           <p:nvPr/>
         </p:nvSpPr>
         <p:spPr>
           <a:xfrm>
-            <a:off x="502920" y="1828800"/>
-            <a:ext cx="5394960" cy="1737360"/>
+            <a:off x="502920" y="2011680"/>
+            <a:ext cx="11155680" cy="2194560"/>
           </a:xfrm>
           <a:prstGeom prst="roundRect">
             <a:avLst>
-              <a:gd name="adj" fmla="val 6316"/>
+              <a:gd name="adj" fmla="val 5000"/>
             </a:avLst>
           </a:prstGeom>
           <a:solidFill>
@@ -3386,14 +3957,14 @@
       </p:sp>
       <p:sp>
         <p:nvSpPr>
-          <p:cNvPr id="8" name="Text 6"/>
-          <p:cNvSpPr txBox="1"/>
-          <p:nvPr/>
-        </p:nvSpPr>
-        <p:spPr>
-          <a:xfrm>
-            <a:off x="822960" y="2011680"/>
-            <a:ext cx="4754880" cy="365760"/>
+          <p:cNvPr id="9" name="Text 7"/>
+          <p:cNvSpPr txBox="1"/>
+          <p:nvPr/>
+        </p:nvSpPr>
+        <p:spPr>
+          <a:xfrm>
+            <a:off x="1005840" y="2331720"/>
+            <a:ext cx="10149840" cy="1554480"/>
           </a:xfrm>
           <a:prstGeom prst="rect">
             <a:avLst/>
@@ -3406,52 +3977,52 @@
           <a:lstStyle/>
           <a:p>
             <a:pPr indent="0" marL="0">
-              <a:buNone/>
-            </a:pPr>
-            <a:r>
-              <a:rPr lang="en-US" sz="1600" b="1" dirty="0">
-                <a:solidFill>
-                  <a:srgbClr val="2D63FF"/>
+              <a:lnSpc>
+                <a:spcPct val="130000"/>
+              </a:lnSpc>
+              <a:buNone/>
+            </a:pPr>
+            <a:r>
+              <a:rPr lang="en-US" sz="2200" dirty="0">
+                <a:solidFill>
+                  <a:srgbClr val="101828"/>
                 </a:solidFill>
                 <a:latin typeface="IBM Plex Sans" pitchFamily="34" charset="0"/>
                 <a:ea typeface="IBM Plex Sans" pitchFamily="34" charset="-122"/>
                 <a:cs typeface="IBM Plex Sans" pitchFamily="34" charset="-120"/>
               </a:rPr>
-              <a:t>Why not one big list</a:t>
-            </a:r>
-            <a:endParaRPr lang="en-US" sz="1600" dirty="0"/>
-          </a:p>
-        </p:txBody>
-      </p:sp>
-      <p:sp>
-        <p:nvSpPr>
-          <p:cNvPr id="9" name="Text 7"/>
-          <p:cNvSpPr txBox="1"/>
-          <p:nvPr/>
-        </p:nvSpPr>
-        <p:spPr>
-          <a:xfrm>
-            <a:off x="822960" y="2395728"/>
-            <a:ext cx="4754880" cy="1005840"/>
-          </a:xfrm>
-          <a:prstGeom prst="rect">
-            <a:avLst/>
-          </a:prstGeom>
-          <a:noFill/>
-          <a:ln/>
-        </p:spPr>
-        <p:txBody>
-          <a:bodyPr wrap="square" lIns="0" tIns="0" rIns="0" bIns="0" rtlCol="0" anchor="t"/>
+              <a:t>Six queries on the Seeds table, all beginning SELECT Name FROM Seeds. Tap the star, work through the table row by row, then match each WHERE line to the records it returns.</a:t>
+            </a:r>
+            <a:endParaRPr lang="en-US" sz="2200" dirty="0"/>
+          </a:p>
+        </p:txBody>
+      </p:sp>
+      <p:sp>
+        <p:nvSpPr>
+          <p:cNvPr id="10" name="Text 8"/>
+          <p:cNvSpPr txBox="1"/>
+          <p:nvPr/>
+        </p:nvSpPr>
+        <p:spPr>
+          <a:xfrm>
+            <a:off x="502920" y="4526280"/>
+            <a:ext cx="11155680" cy="457200"/>
+          </a:xfrm>
+          <a:prstGeom prst="rect">
+            <a:avLst/>
+          </a:prstGeom>
+          <a:noFill/>
+          <a:ln/>
+        </p:spPr>
+        <p:txBody>
+          <a:bodyPr wrap="square" lIns="0" tIns="0" rIns="0" bIns="0" rtlCol="0" anchor="ctr"/>
           <a:lstStyle/>
           <a:p>
             <a:pPr indent="0" marL="0">
-              <a:lnSpc>
-                <a:spcPct val="120000"/>
-              </a:lnSpc>
-              <a:buNone/>
-            </a:pPr>
-            <a:r>
-              <a:rPr lang="en-US" sz="1300" dirty="0">
+              <a:buNone/>
+            </a:pPr>
+            <a:r>
+              <a:rPr lang="en-US" sz="1600" dirty="0">
                 <a:solidFill>
                   <a:srgbClr val="667085"/>
                 </a:solidFill>
@@ -3459,333 +4030,9 @@
                 <a:ea typeface="IBM Plex Sans" pitchFamily="34" charset="-122"/>
                 <a:cs typeface="IBM Plex Sans" pitchFamily="34" charset="-120"/>
               </a:rPr>
-              <a:t>A table of records keeps related data together, so one row can be added, changed or deleted without disturbing any other. Storing the same data as separate lists of names and separate lists of numbers makes it far too easy for the lists to drift out of step.</a:t>
-            </a:r>
-            <a:endParaRPr lang="en-US" sz="1300" dirty="0"/>
-          </a:p>
-        </p:txBody>
-      </p:sp>
-      <p:sp>
-        <p:nvSpPr>
-          <p:cNvPr id="10" name="Shape 8"/>
-          <p:cNvSpPr/>
-          <p:nvPr/>
-        </p:nvSpPr>
-        <p:spPr>
-          <a:xfrm>
-            <a:off x="6217920" y="1828800"/>
-            <a:ext cx="5394960" cy="1737360"/>
-          </a:xfrm>
-          <a:prstGeom prst="roundRect">
-            <a:avLst>
-              <a:gd name="adj" fmla="val 6316"/>
-            </a:avLst>
-          </a:prstGeom>
-          <a:solidFill>
-            <a:srgbClr val="FFFFFF"/>
-          </a:solidFill>
-          <a:ln w="15875">
-            <a:solidFill>
-              <a:srgbClr val="08A6A6"/>
-            </a:solidFill>
-            <a:prstDash val="solid"/>
-          </a:ln>
-        </p:spPr>
-      </p:sp>
-      <p:sp>
-        <p:nvSpPr>
-          <p:cNvPr id="11" name="Text 9"/>
-          <p:cNvSpPr txBox="1"/>
-          <p:nvPr/>
-        </p:nvSpPr>
-        <p:spPr>
-          <a:xfrm>
-            <a:off x="6537960" y="2011680"/>
-            <a:ext cx="4754880" cy="365760"/>
-          </a:xfrm>
-          <a:prstGeom prst="rect">
-            <a:avLst/>
-          </a:prstGeom>
-          <a:noFill/>
-          <a:ln/>
-        </p:spPr>
-        <p:txBody>
-          <a:bodyPr wrap="square" lIns="0" tIns="0" rIns="0" bIns="0" rtlCol="0" anchor="ctr"/>
-          <a:lstStyle/>
-          <a:p>
-            <a:pPr indent="0" marL="0">
-              <a:buNone/>
-            </a:pPr>
-            <a:r>
-              <a:rPr lang="en-US" sz="1600" b="1" dirty="0">
-                <a:solidFill>
-                  <a:srgbClr val="08A6A6"/>
-                </a:solidFill>
-                <a:latin typeface="IBM Plex Sans" pitchFamily="34" charset="0"/>
-                <a:ea typeface="IBM Plex Sans" pitchFamily="34" charset="-122"/>
-                <a:cs typeface="IBM Plex Sans" pitchFamily="34" charset="-120"/>
-              </a:rPr>
-              <a:t>Primary keys</a:t>
+              <a:t>Predict on paper first, then look down and test it.</a:t>
             </a:r>
             <a:endParaRPr lang="en-US" sz="1600" dirty="0"/>
-          </a:p>
-        </p:txBody>
-      </p:sp>
-      <p:sp>
-        <p:nvSpPr>
-          <p:cNvPr id="12" name="Text 10"/>
-          <p:cNvSpPr txBox="1"/>
-          <p:nvPr/>
-        </p:nvSpPr>
-        <p:spPr>
-          <a:xfrm>
-            <a:off x="6537960" y="2395728"/>
-            <a:ext cx="4754880" cy="1005840"/>
-          </a:xfrm>
-          <a:prstGeom prst="rect">
-            <a:avLst/>
-          </a:prstGeom>
-          <a:noFill/>
-          <a:ln/>
-        </p:spPr>
-        <p:txBody>
-          <a:bodyPr wrap="square" lIns="0" tIns="0" rIns="0" bIns="0" rtlCol="0" anchor="t"/>
-          <a:lstStyle/>
-          <a:p>
-            <a:pPr indent="0" marL="0">
-              <a:lnSpc>
-                <a:spcPct val="120000"/>
-              </a:lnSpc>
-              <a:buNone/>
-            </a:pPr>
-            <a:r>
-              <a:rPr lang="en-US" sz="1300" dirty="0">
-                <a:solidFill>
-                  <a:srgbClr val="667085"/>
-                </a:solidFill>
-                <a:latin typeface="IBM Plex Sans" pitchFamily="34" charset="0"/>
-                <a:ea typeface="IBM Plex Sans" pitchFamily="34" charset="-122"/>
-                <a:cs typeface="IBM Plex Sans" pitchFamily="34" charset="-120"/>
-              </a:rPr>
-              <a:t>A field like SeedID that is different for every record is called a primary key. It matters because two packets could easily share a name, but a key is guaranteed to pick out exactly one record.</a:t>
-            </a:r>
-            <a:endParaRPr lang="en-US" sz="1300" dirty="0"/>
-          </a:p>
-        </p:txBody>
-      </p:sp>
-      <p:sp>
-        <p:nvSpPr>
-          <p:cNvPr id="13" name="Shape 11"/>
-          <p:cNvSpPr/>
-          <p:nvPr/>
-        </p:nvSpPr>
-        <p:spPr>
-          <a:xfrm>
-            <a:off x="502920" y="3794760"/>
-            <a:ext cx="5394960" cy="1737360"/>
-          </a:xfrm>
-          <a:prstGeom prst="roundRect">
-            <a:avLst>
-              <a:gd name="adj" fmla="val 6316"/>
-            </a:avLst>
-          </a:prstGeom>
-          <a:solidFill>
-            <a:srgbClr val="FFFFFF"/>
-          </a:solidFill>
-          <a:ln w="15875">
-            <a:solidFill>
-              <a:srgbClr val="2D63FF"/>
-            </a:solidFill>
-            <a:prstDash val="solid"/>
-          </a:ln>
-        </p:spPr>
-      </p:sp>
-      <p:sp>
-        <p:nvSpPr>
-          <p:cNvPr id="14" name="Text 12"/>
-          <p:cNvSpPr txBox="1"/>
-          <p:nvPr/>
-        </p:nvSpPr>
-        <p:spPr>
-          <a:xfrm>
-            <a:off x="822960" y="3977640"/>
-            <a:ext cx="4754880" cy="365760"/>
-          </a:xfrm>
-          <a:prstGeom prst="rect">
-            <a:avLst/>
-          </a:prstGeom>
-          <a:noFill/>
-          <a:ln/>
-        </p:spPr>
-        <p:txBody>
-          <a:bodyPr wrap="square" lIns="0" tIns="0" rIns="0" bIns="0" rtlCol="0" anchor="ctr"/>
-          <a:lstStyle/>
-          <a:p>
-            <a:pPr indent="0" marL="0">
-              <a:buNone/>
-            </a:pPr>
-            <a:r>
-              <a:rPr lang="en-US" sz="1600" b="1" dirty="0">
-                <a:solidFill>
-                  <a:srgbClr val="2D63FF"/>
-                </a:solidFill>
-                <a:latin typeface="IBM Plex Sans" pitchFamily="34" charset="0"/>
-                <a:ea typeface="IBM Plex Sans" pitchFamily="34" charset="-122"/>
-                <a:cs typeface="IBM Plex Sans" pitchFamily="34" charset="-120"/>
-              </a:rPr>
-              <a:t>SQL is everywhere</a:t>
-            </a:r>
-            <a:endParaRPr lang="en-US" sz="1600" dirty="0"/>
-          </a:p>
-        </p:txBody>
-      </p:sp>
-      <p:sp>
-        <p:nvSpPr>
-          <p:cNvPr id="15" name="Text 13"/>
-          <p:cNvSpPr txBox="1"/>
-          <p:nvPr/>
-        </p:nvSpPr>
-        <p:spPr>
-          <a:xfrm>
-            <a:off x="822960" y="4361688"/>
-            <a:ext cx="4754880" cy="1005840"/>
-          </a:xfrm>
-          <a:prstGeom prst="rect">
-            <a:avLst/>
-          </a:prstGeom>
-          <a:noFill/>
-          <a:ln/>
-        </p:spPr>
-        <p:txBody>
-          <a:bodyPr wrap="square" lIns="0" tIns="0" rIns="0" bIns="0" rtlCol="0" anchor="t"/>
-          <a:lstStyle/>
-          <a:p>
-            <a:pPr indent="0" marL="0">
-              <a:lnSpc>
-                <a:spcPct val="120000"/>
-              </a:lnSpc>
-              <a:buNone/>
-            </a:pPr>
-            <a:r>
-              <a:rPr lang="en-US" sz="1300" dirty="0">
-                <a:solidFill>
-                  <a:srgbClr val="667085"/>
-                </a:solidFill>
-                <a:latin typeface="IBM Plex Sans" pitchFamily="34" charset="0"/>
-                <a:ea typeface="IBM Plex Sans" pitchFamily="34" charset="-122"/>
-                <a:cs typeface="IBM Plex Sans" pitchFamily="34" charset="-120"/>
-              </a:rPr>
-              <a:t>The same SELECT, FROM and WHERE are used by almost every database in the world, from a school register to an airline booking system. Learning them once means you can query any of them.</a:t>
-            </a:r>
-            <a:endParaRPr lang="en-US" sz="1300" dirty="0"/>
-          </a:p>
-        </p:txBody>
-      </p:sp>
-      <p:sp>
-        <p:nvSpPr>
-          <p:cNvPr id="16" name="Shape 14"/>
-          <p:cNvSpPr/>
-          <p:nvPr/>
-        </p:nvSpPr>
-        <p:spPr>
-          <a:xfrm>
-            <a:off x="6217920" y="3794760"/>
-            <a:ext cx="5394960" cy="1737360"/>
-          </a:xfrm>
-          <a:prstGeom prst="roundRect">
-            <a:avLst>
-              <a:gd name="adj" fmla="val 6316"/>
-            </a:avLst>
-          </a:prstGeom>
-          <a:solidFill>
-            <a:srgbClr val="FFFFFF"/>
-          </a:solidFill>
-          <a:ln w="15875">
-            <a:solidFill>
-              <a:srgbClr val="08A6A6"/>
-            </a:solidFill>
-            <a:prstDash val="solid"/>
-          </a:ln>
-        </p:spPr>
-      </p:sp>
-      <p:sp>
-        <p:nvSpPr>
-          <p:cNvPr id="17" name="Text 15"/>
-          <p:cNvSpPr txBox="1"/>
-          <p:nvPr/>
-        </p:nvSpPr>
-        <p:spPr>
-          <a:xfrm>
-            <a:off x="6537960" y="3977640"/>
-            <a:ext cx="4754880" cy="365760"/>
-          </a:xfrm>
-          <a:prstGeom prst="rect">
-            <a:avLst/>
-          </a:prstGeom>
-          <a:noFill/>
-          <a:ln/>
-        </p:spPr>
-        <p:txBody>
-          <a:bodyPr wrap="square" lIns="0" tIns="0" rIns="0" bIns="0" rtlCol="0" anchor="ctr"/>
-          <a:lstStyle/>
-          <a:p>
-            <a:pPr indent="0" marL="0">
-              <a:buNone/>
-            </a:pPr>
-            <a:r>
-              <a:rPr lang="en-US" sz="1600" b="1" dirty="0">
-                <a:solidFill>
-                  <a:srgbClr val="08A6A6"/>
-                </a:solidFill>
-                <a:latin typeface="IBM Plex Sans" pitchFamily="34" charset="0"/>
-                <a:ea typeface="IBM Plex Sans" pitchFamily="34" charset="-122"/>
-                <a:cs typeface="IBM Plex Sans" pitchFamily="34" charset="-120"/>
-              </a:rPr>
-              <a:t>The order the lines go in</a:t>
-            </a:r>
-            <a:endParaRPr lang="en-US" sz="1600" dirty="0"/>
-          </a:p>
-        </p:txBody>
-      </p:sp>
-      <p:sp>
-        <p:nvSpPr>
-          <p:cNvPr id="18" name="Text 16"/>
-          <p:cNvSpPr txBox="1"/>
-          <p:nvPr/>
-        </p:nvSpPr>
-        <p:spPr>
-          <a:xfrm>
-            <a:off x="6537960" y="4361688"/>
-            <a:ext cx="4754880" cy="1005840"/>
-          </a:xfrm>
-          <a:prstGeom prst="rect">
-            <a:avLst/>
-          </a:prstGeom>
-          <a:noFill/>
-          <a:ln/>
-        </p:spPr>
-        <p:txBody>
-          <a:bodyPr wrap="square" lIns="0" tIns="0" rIns="0" bIns="0" rtlCol="0" anchor="t"/>
-          <a:lstStyle/>
-          <a:p>
-            <a:pPr indent="0" marL="0">
-              <a:lnSpc>
-                <a:spcPct val="120000"/>
-              </a:lnSpc>
-              <a:buNone/>
-            </a:pPr>
-            <a:r>
-              <a:rPr lang="en-US" sz="1300" dirty="0">
-                <a:solidFill>
-                  <a:srgbClr val="667085"/>
-                </a:solidFill>
-                <a:latin typeface="IBM Plex Sans" pitchFamily="34" charset="0"/>
-                <a:ea typeface="IBM Plex Sans" pitchFamily="34" charset="-122"/>
-                <a:cs typeface="IBM Plex Sans" pitchFamily="34" charset="-120"/>
-              </a:rPr>
-              <a:t>SQL is read by the database in a fixed order: find the table named in FROM, keep only the records that satisfy WHERE, then return the fields listed in SELECT. Knowing that order explains why a query that returns nothing usually has a problem in its WHERE line.</a:t>
-            </a:r>
-            <a:endParaRPr lang="en-US" sz="1300" dirty="0"/>
           </a:p>
         </p:txBody>
       </p:sp>
@@ -3952,7 +4199,7 @@
                 <a:ea typeface="IBM Plex Sans" pitchFamily="34" charset="-122"/>
                 <a:cs typeface="IBM Plex Sans" pitchFamily="34" charset="-120"/>
               </a:rPr>
-              <a:t>Exam practice</a:t>
+              <a:t>Worth knowing</a:t>
             </a:r>
             <a:endParaRPr lang="en-US" sz="3200" dirty="0"/>
           </a:p>
@@ -3991,7 +4238,7 @@
                 <a:ea typeface="IBM Plex Sans" pitchFamily="34" charset="-122"/>
                 <a:cs typeface="IBM Plex Sans" pitchFamily="34" charset="-120"/>
               </a:rPr>
-              <a:t>Devices away. Answer from memory on the worksheet.</a:t>
+              <a:t>The information markers dotted around the room</a:t>
             </a:r>
             <a:endParaRPr lang="en-US" sz="1500" dirty="0"/>
           </a:p>
@@ -4006,11 +4253,11 @@
         <p:spPr>
           <a:xfrm>
             <a:off x="502920" y="1828800"/>
-            <a:ext cx="11155680" cy="1097280"/>
+            <a:ext cx="5394960" cy="1737360"/>
           </a:xfrm>
           <a:prstGeom prst="roundRect">
             <a:avLst>
-              <a:gd name="adj" fmla="val 10000"/>
+              <a:gd name="adj" fmla="val 6316"/>
             </a:avLst>
           </a:prstGeom>
           <a:solidFill>
@@ -4018,7 +4265,7 @@
           </a:solidFill>
           <a:ln w="15875">
             <a:solidFill>
-              <a:srgbClr val="D9DEE7"/>
+              <a:srgbClr val="2D63FF"/>
             </a:solidFill>
             <a:prstDash val="solid"/>
           </a:ln>
@@ -4032,8 +4279,8 @@
         </p:nvSpPr>
         <p:spPr>
           <a:xfrm>
-            <a:off x="914400" y="1938528"/>
-            <a:ext cx="9418320" cy="877824"/>
+            <a:off x="822960" y="2011680"/>
+            <a:ext cx="4754880" cy="365760"/>
           </a:xfrm>
           <a:prstGeom prst="rect">
             <a:avLst/>
@@ -4046,101 +4293,79 @@
           <a:lstStyle/>
           <a:p>
             <a:pPr indent="0" marL="0">
-              <a:lnSpc>
-                <a:spcPct val="118000"/>
-              </a:lnSpc>
-              <a:buNone/>
-            </a:pPr>
-            <a:r>
-              <a:rPr lang="en-US" sz="1700" dirty="0">
-                <a:solidFill>
-                  <a:srgbClr val="101828"/>
+              <a:buNone/>
+            </a:pPr>
+            <a:r>
+              <a:rPr lang="en-US" sz="1600" b="1" dirty="0">
+                <a:solidFill>
+                  <a:srgbClr val="2D63FF"/>
                 </a:solidFill>
                 <a:latin typeface="IBM Plex Sans" pitchFamily="34" charset="0"/>
                 <a:ea typeface="IBM Plex Sans" pitchFamily="34" charset="-122"/>
                 <a:cs typeface="IBM Plex Sans" pitchFamily="34" charset="-120"/>
               </a:rPr>
-              <a:t>State what is meant by a record and what is meant by a field.</a:t>
-            </a:r>
-            <a:endParaRPr lang="en-US" sz="1700" dirty="0"/>
-          </a:p>
-        </p:txBody>
-      </p:sp>
-      <p:sp>
-        <p:nvSpPr>
-          <p:cNvPr id="9" name="Shape 7"/>
+              <a:t>Why not one big list</a:t>
+            </a:r>
+            <a:endParaRPr lang="en-US" sz="1600" dirty="0"/>
+          </a:p>
+        </p:txBody>
+      </p:sp>
+      <p:sp>
+        <p:nvSpPr>
+          <p:cNvPr id="9" name="Text 7"/>
+          <p:cNvSpPr txBox="1"/>
+          <p:nvPr/>
+        </p:nvSpPr>
+        <p:spPr>
+          <a:xfrm>
+            <a:off x="822960" y="2395728"/>
+            <a:ext cx="4754880" cy="1005840"/>
+          </a:xfrm>
+          <a:prstGeom prst="rect">
+            <a:avLst/>
+          </a:prstGeom>
+          <a:noFill/>
+          <a:ln/>
+        </p:spPr>
+        <p:txBody>
+          <a:bodyPr wrap="square" lIns="0" tIns="0" rIns="0" bIns="0" rtlCol="0" anchor="t"/>
+          <a:lstStyle/>
+          <a:p>
+            <a:pPr indent="0" marL="0">
+              <a:lnSpc>
+                <a:spcPct val="120000"/>
+              </a:lnSpc>
+              <a:buNone/>
+            </a:pPr>
+            <a:r>
+              <a:rPr lang="en-US" sz="1300" dirty="0">
+                <a:solidFill>
+                  <a:srgbClr val="667085"/>
+                </a:solidFill>
+                <a:latin typeface="IBM Plex Sans" pitchFamily="34" charset="0"/>
+                <a:ea typeface="IBM Plex Sans" pitchFamily="34" charset="-122"/>
+                <a:cs typeface="IBM Plex Sans" pitchFamily="34" charset="-120"/>
+              </a:rPr>
+              <a:t>A table of records keeps related data together, so one row can be added, changed or deleted without disturbing any other. Storing the same data as separate lists of names and separate lists of numbers makes it far too easy for the lists to drift out of step.</a:t>
+            </a:r>
+            <a:endParaRPr lang="en-US" sz="1300" dirty="0"/>
+          </a:p>
+        </p:txBody>
+      </p:sp>
+      <p:sp>
+        <p:nvSpPr>
+          <p:cNvPr id="10" name="Shape 8"/>
           <p:cNvSpPr/>
           <p:nvPr/>
         </p:nvSpPr>
         <p:spPr>
           <a:xfrm>
-            <a:off x="10515600" y="2130552"/>
-            <a:ext cx="868680" cy="493776"/>
+            <a:off x="6217920" y="1828800"/>
+            <a:ext cx="5394960" cy="1737360"/>
           </a:xfrm>
           <a:prstGeom prst="roundRect">
             <a:avLst>
-              <a:gd name="adj" fmla="val 18519"/>
-            </a:avLst>
-          </a:prstGeom>
-          <a:solidFill>
-            <a:srgbClr val="EEF2FB"/>
-          </a:solidFill>
-          <a:ln/>
-        </p:spPr>
-      </p:sp>
-      <p:sp>
-        <p:nvSpPr>
-          <p:cNvPr id="10" name="Text 8"/>
-          <p:cNvSpPr txBox="1"/>
-          <p:nvPr/>
-        </p:nvSpPr>
-        <p:spPr>
-          <a:xfrm>
-            <a:off x="10515600" y="2130552"/>
-            <a:ext cx="868680" cy="493776"/>
-          </a:xfrm>
-          <a:prstGeom prst="rect">
-            <a:avLst/>
-          </a:prstGeom>
-          <a:noFill/>
-          <a:ln/>
-        </p:spPr>
-        <p:txBody>
-          <a:bodyPr wrap="square" lIns="0" tIns="0" rIns="0" bIns="0" rtlCol="0" anchor="ctr"/>
-          <a:lstStyle/>
-          <a:p>
-            <a:pPr algn="ctr" indent="0" marL="0">
-              <a:buNone/>
-            </a:pPr>
-            <a:r>
-              <a:rPr lang="en-US" sz="1500" b="1" dirty="0">
-                <a:solidFill>
-                  <a:srgbClr val="2D63FF"/>
-                </a:solidFill>
-                <a:latin typeface="IBM Plex Mono" pitchFamily="34" charset="0"/>
-                <a:ea typeface="IBM Plex Mono" pitchFamily="34" charset="-122"/>
-                <a:cs typeface="IBM Plex Mono" pitchFamily="34" charset="-120"/>
-              </a:rPr>
-              <a:t>[2]</a:t>
-            </a:r>
-            <a:endParaRPr lang="en-US" sz="1500" dirty="0"/>
-          </a:p>
-        </p:txBody>
-      </p:sp>
-      <p:sp>
-        <p:nvSpPr>
-          <p:cNvPr id="11" name="Shape 9"/>
-          <p:cNvSpPr/>
-          <p:nvPr/>
-        </p:nvSpPr>
-        <p:spPr>
-          <a:xfrm>
-            <a:off x="502920" y="3127248"/>
-            <a:ext cx="11155680" cy="1097280"/>
-          </a:xfrm>
-          <a:prstGeom prst="roundRect">
-            <a:avLst>
-              <a:gd name="adj" fmla="val 10000"/>
+              <a:gd name="adj" fmla="val 6316"/>
             </a:avLst>
           </a:prstGeom>
           <a:solidFill>
@@ -4148,7 +4373,7 @@
           </a:solidFill>
           <a:ln w="15875">
             <a:solidFill>
-              <a:srgbClr val="D9DEE7"/>
+              <a:srgbClr val="08A6A6"/>
             </a:solidFill>
             <a:prstDash val="solid"/>
           </a:ln>
@@ -4156,14 +4381,14 @@
       </p:sp>
       <p:sp>
         <p:nvSpPr>
-          <p:cNvPr id="12" name="Text 10"/>
-          <p:cNvSpPr txBox="1"/>
-          <p:nvPr/>
-        </p:nvSpPr>
-        <p:spPr>
-          <a:xfrm>
-            <a:off x="914400" y="3236976"/>
-            <a:ext cx="9418320" cy="877824"/>
+          <p:cNvPr id="11" name="Text 9"/>
+          <p:cNvSpPr txBox="1"/>
+          <p:nvPr/>
+        </p:nvSpPr>
+        <p:spPr>
+          <a:xfrm>
+            <a:off x="6537960" y="2011680"/>
+            <a:ext cx="4754880" cy="365760"/>
           </a:xfrm>
           <a:prstGeom prst="rect">
             <a:avLst/>
@@ -4176,23 +4401,62 @@
           <a:lstStyle/>
           <a:p>
             <a:pPr indent="0" marL="0">
-              <a:lnSpc>
-                <a:spcPct val="118000"/>
-              </a:lnSpc>
-              <a:buNone/>
-            </a:pPr>
-            <a:r>
-              <a:rPr lang="en-US" sz="1700" dirty="0">
-                <a:solidFill>
-                  <a:srgbClr val="101828"/>
+              <a:buNone/>
+            </a:pPr>
+            <a:r>
+              <a:rPr lang="en-US" sz="1600" b="1" dirty="0">
+                <a:solidFill>
+                  <a:srgbClr val="08A6A6"/>
                 </a:solidFill>
                 <a:latin typeface="IBM Plex Sans" pitchFamily="34" charset="0"/>
                 <a:ea typeface="IBM Plex Sans" pitchFamily="34" charset="-122"/>
                 <a:cs typeface="IBM Plex Sans" pitchFamily="34" charset="-120"/>
               </a:rPr>
-              <a:t>A table called Seeds has the fields SeedID, Name, Family and PacketsLeft. Write an SQL query that returns the name of every seed with fewer than five packets left.</a:t>
-            </a:r>
-            <a:endParaRPr lang="en-US" sz="1700" dirty="0"/>
+              <a:t>Primary keys</a:t>
+            </a:r>
+            <a:endParaRPr lang="en-US" sz="1600" dirty="0"/>
+          </a:p>
+        </p:txBody>
+      </p:sp>
+      <p:sp>
+        <p:nvSpPr>
+          <p:cNvPr id="12" name="Text 10"/>
+          <p:cNvSpPr txBox="1"/>
+          <p:nvPr/>
+        </p:nvSpPr>
+        <p:spPr>
+          <a:xfrm>
+            <a:off x="6537960" y="2395728"/>
+            <a:ext cx="4754880" cy="1005840"/>
+          </a:xfrm>
+          <a:prstGeom prst="rect">
+            <a:avLst/>
+          </a:prstGeom>
+          <a:noFill/>
+          <a:ln/>
+        </p:spPr>
+        <p:txBody>
+          <a:bodyPr wrap="square" lIns="0" tIns="0" rIns="0" bIns="0" rtlCol="0" anchor="t"/>
+          <a:lstStyle/>
+          <a:p>
+            <a:pPr indent="0" marL="0">
+              <a:lnSpc>
+                <a:spcPct val="120000"/>
+              </a:lnSpc>
+              <a:buNone/>
+            </a:pPr>
+            <a:r>
+              <a:rPr lang="en-US" sz="1300" dirty="0">
+                <a:solidFill>
+                  <a:srgbClr val="667085"/>
+                </a:solidFill>
+                <a:latin typeface="IBM Plex Sans" pitchFamily="34" charset="0"/>
+                <a:ea typeface="IBM Plex Sans" pitchFamily="34" charset="-122"/>
+                <a:cs typeface="IBM Plex Sans" pitchFamily="34" charset="-120"/>
+              </a:rPr>
+              <a:t>A field like SeedID that is different for every record is called a primary key. It matters because two packets could easily share a name, but a key is guaranteed to pick out exactly one record.</a:t>
+            </a:r>
+            <a:endParaRPr lang="en-US" sz="1300" dirty="0"/>
           </a:p>
         </p:txBody>
       </p:sp>
@@ -4204,73 +4468,12 @@
         </p:nvSpPr>
         <p:spPr>
           <a:xfrm>
-            <a:off x="10515600" y="3429000"/>
-            <a:ext cx="868680" cy="493776"/>
+            <a:off x="502920" y="3794760"/>
+            <a:ext cx="5394960" cy="1737360"/>
           </a:xfrm>
           <a:prstGeom prst="roundRect">
             <a:avLst>
-              <a:gd name="adj" fmla="val 18519"/>
-            </a:avLst>
-          </a:prstGeom>
-          <a:solidFill>
-            <a:srgbClr val="EEF2FB"/>
-          </a:solidFill>
-          <a:ln/>
-        </p:spPr>
-      </p:sp>
-      <p:sp>
-        <p:nvSpPr>
-          <p:cNvPr id="14" name="Text 12"/>
-          <p:cNvSpPr txBox="1"/>
-          <p:nvPr/>
-        </p:nvSpPr>
-        <p:spPr>
-          <a:xfrm>
-            <a:off x="10515600" y="3429000"/>
-            <a:ext cx="868680" cy="493776"/>
-          </a:xfrm>
-          <a:prstGeom prst="rect">
-            <a:avLst/>
-          </a:prstGeom>
-          <a:noFill/>
-          <a:ln/>
-        </p:spPr>
-        <p:txBody>
-          <a:bodyPr wrap="square" lIns="0" tIns="0" rIns="0" bIns="0" rtlCol="0" anchor="ctr"/>
-          <a:lstStyle/>
-          <a:p>
-            <a:pPr algn="ctr" indent="0" marL="0">
-              <a:buNone/>
-            </a:pPr>
-            <a:r>
-              <a:rPr lang="en-US" sz="1500" b="1" dirty="0">
-                <a:solidFill>
-                  <a:srgbClr val="2D63FF"/>
-                </a:solidFill>
-                <a:latin typeface="IBM Plex Mono" pitchFamily="34" charset="0"/>
-                <a:ea typeface="IBM Plex Mono" pitchFamily="34" charset="-122"/>
-                <a:cs typeface="IBM Plex Mono" pitchFamily="34" charset="-120"/>
-              </a:rPr>
-              <a:t>[3]</a:t>
-            </a:r>
-            <a:endParaRPr lang="en-US" sz="1500" dirty="0"/>
-          </a:p>
-        </p:txBody>
-      </p:sp>
-      <p:sp>
-        <p:nvSpPr>
-          <p:cNvPr id="15" name="Shape 13"/>
-          <p:cNvSpPr/>
-          <p:nvPr/>
-        </p:nvSpPr>
-        <p:spPr>
-          <a:xfrm>
-            <a:off x="502920" y="4425696"/>
-            <a:ext cx="11155680" cy="1097280"/>
-          </a:xfrm>
-          <a:prstGeom prst="roundRect">
-            <a:avLst>
-              <a:gd name="adj" fmla="val 10000"/>
+              <a:gd name="adj" fmla="val 6316"/>
             </a:avLst>
           </a:prstGeom>
           <a:solidFill>
@@ -4278,7 +4481,7 @@
           </a:solidFill>
           <a:ln w="15875">
             <a:solidFill>
-              <a:srgbClr val="D9DEE7"/>
+              <a:srgbClr val="2D63FF"/>
             </a:solidFill>
             <a:prstDash val="solid"/>
           </a:ln>
@@ -4286,14 +4489,14 @@
       </p:sp>
       <p:sp>
         <p:nvSpPr>
-          <p:cNvPr id="16" name="Text 14"/>
-          <p:cNvSpPr txBox="1"/>
-          <p:nvPr/>
-        </p:nvSpPr>
-        <p:spPr>
-          <a:xfrm>
-            <a:off x="914400" y="4535424"/>
-            <a:ext cx="9418320" cy="877824"/>
+          <p:cNvPr id="14" name="Text 12"/>
+          <p:cNvSpPr txBox="1"/>
+          <p:nvPr/>
+        </p:nvSpPr>
+        <p:spPr>
+          <a:xfrm>
+            <a:off x="822960" y="3977640"/>
+            <a:ext cx="4754880" cy="365760"/>
           </a:xfrm>
           <a:prstGeom prst="rect">
             <a:avLst/>
@@ -4306,47 +4509,130 @@
           <a:lstStyle/>
           <a:p>
             <a:pPr indent="0" marL="0">
-              <a:lnSpc>
-                <a:spcPct val="118000"/>
-              </a:lnSpc>
-              <a:buNone/>
-            </a:pPr>
-            <a:r>
-              <a:rPr lang="en-US" sz="1700" dirty="0">
-                <a:solidFill>
-                  <a:srgbClr val="101828"/>
+              <a:buNone/>
+            </a:pPr>
+            <a:r>
+              <a:rPr lang="en-US" sz="1600" b="1" dirty="0">
+                <a:solidFill>
+                  <a:srgbClr val="2D63FF"/>
                 </a:solidFill>
                 <a:latin typeface="IBM Plex Sans" pitchFamily="34" charset="0"/>
                 <a:ea typeface="IBM Plex Sans" pitchFamily="34" charset="-122"/>
                 <a:cs typeface="IBM Plex Sans" pitchFamily="34" charset="-120"/>
               </a:rPr>
-              <a:t>Explain the difference between using AND and using OR in the WHERE line of a query. Use an example of each in your answer.</a:t>
-            </a:r>
-            <a:endParaRPr lang="en-US" sz="1700" dirty="0"/>
-          </a:p>
-        </p:txBody>
-      </p:sp>
-      <p:sp>
-        <p:nvSpPr>
-          <p:cNvPr id="17" name="Shape 15"/>
+              <a:t>SQL is everywhere</a:t>
+            </a:r>
+            <a:endParaRPr lang="en-US" sz="1600" dirty="0"/>
+          </a:p>
+        </p:txBody>
+      </p:sp>
+      <p:sp>
+        <p:nvSpPr>
+          <p:cNvPr id="15" name="Text 13"/>
+          <p:cNvSpPr txBox="1"/>
+          <p:nvPr/>
+        </p:nvSpPr>
+        <p:spPr>
+          <a:xfrm>
+            <a:off x="822960" y="4361688"/>
+            <a:ext cx="4754880" cy="1005840"/>
+          </a:xfrm>
+          <a:prstGeom prst="rect">
+            <a:avLst/>
+          </a:prstGeom>
+          <a:noFill/>
+          <a:ln/>
+        </p:spPr>
+        <p:txBody>
+          <a:bodyPr wrap="square" lIns="0" tIns="0" rIns="0" bIns="0" rtlCol="0" anchor="t"/>
+          <a:lstStyle/>
+          <a:p>
+            <a:pPr indent="0" marL="0">
+              <a:lnSpc>
+                <a:spcPct val="120000"/>
+              </a:lnSpc>
+              <a:buNone/>
+            </a:pPr>
+            <a:r>
+              <a:rPr lang="en-US" sz="1300" dirty="0">
+                <a:solidFill>
+                  <a:srgbClr val="667085"/>
+                </a:solidFill>
+                <a:latin typeface="IBM Plex Sans" pitchFamily="34" charset="0"/>
+                <a:ea typeface="IBM Plex Sans" pitchFamily="34" charset="-122"/>
+                <a:cs typeface="IBM Plex Sans" pitchFamily="34" charset="-120"/>
+              </a:rPr>
+              <a:t>The same SELECT, FROM and WHERE are used by almost every database in the world, from a school register to an airline booking system. Learning them once means you can query any of them.</a:t>
+            </a:r>
+            <a:endParaRPr lang="en-US" sz="1300" dirty="0"/>
+          </a:p>
+        </p:txBody>
+      </p:sp>
+      <p:sp>
+        <p:nvSpPr>
+          <p:cNvPr id="16" name="Shape 14"/>
           <p:cNvSpPr/>
           <p:nvPr/>
         </p:nvSpPr>
         <p:spPr>
           <a:xfrm>
-            <a:off x="10515600" y="4727448"/>
-            <a:ext cx="868680" cy="493776"/>
+            <a:off x="6217920" y="3794760"/>
+            <a:ext cx="5394960" cy="1737360"/>
           </a:xfrm>
           <a:prstGeom prst="roundRect">
             <a:avLst>
-              <a:gd name="adj" fmla="val 18519"/>
+              <a:gd name="adj" fmla="val 6316"/>
             </a:avLst>
           </a:prstGeom>
           <a:solidFill>
-            <a:srgbClr val="EEF2FB"/>
+            <a:srgbClr val="FFFFFF"/>
           </a:solidFill>
-          <a:ln/>
-        </p:spPr>
+          <a:ln w="15875">
+            <a:solidFill>
+              <a:srgbClr val="08A6A6"/>
+            </a:solidFill>
+            <a:prstDash val="solid"/>
+          </a:ln>
+        </p:spPr>
+      </p:sp>
+      <p:sp>
+        <p:nvSpPr>
+          <p:cNvPr id="17" name="Text 15"/>
+          <p:cNvSpPr txBox="1"/>
+          <p:nvPr/>
+        </p:nvSpPr>
+        <p:spPr>
+          <a:xfrm>
+            <a:off x="6537960" y="3977640"/>
+            <a:ext cx="4754880" cy="365760"/>
+          </a:xfrm>
+          <a:prstGeom prst="rect">
+            <a:avLst/>
+          </a:prstGeom>
+          <a:noFill/>
+          <a:ln/>
+        </p:spPr>
+        <p:txBody>
+          <a:bodyPr wrap="square" lIns="0" tIns="0" rIns="0" bIns="0" rtlCol="0" anchor="ctr"/>
+          <a:lstStyle/>
+          <a:p>
+            <a:pPr indent="0" marL="0">
+              <a:buNone/>
+            </a:pPr>
+            <a:r>
+              <a:rPr lang="en-US" sz="1600" b="1" dirty="0">
+                <a:solidFill>
+                  <a:srgbClr val="08A6A6"/>
+                </a:solidFill>
+                <a:latin typeface="IBM Plex Sans" pitchFamily="34" charset="0"/>
+                <a:ea typeface="IBM Plex Sans" pitchFamily="34" charset="-122"/>
+                <a:cs typeface="IBM Plex Sans" pitchFamily="34" charset="-120"/>
+              </a:rPr>
+              <a:t>The order the lines go in</a:t>
+            </a:r>
+            <a:endParaRPr lang="en-US" sz="1600" dirty="0"/>
+          </a:p>
+        </p:txBody>
       </p:sp>
       <p:sp>
         <p:nvSpPr>
@@ -4356,34 +4642,37 @@
         </p:nvSpPr>
         <p:spPr>
           <a:xfrm>
-            <a:off x="10515600" y="4727448"/>
-            <a:ext cx="868680" cy="493776"/>
-          </a:xfrm>
-          <a:prstGeom prst="rect">
-            <a:avLst/>
-          </a:prstGeom>
-          <a:noFill/>
-          <a:ln/>
-        </p:spPr>
-        <p:txBody>
-          <a:bodyPr wrap="square" lIns="0" tIns="0" rIns="0" bIns="0" rtlCol="0" anchor="ctr"/>
-          <a:lstStyle/>
-          <a:p>
-            <a:pPr algn="ctr" indent="0" marL="0">
-              <a:buNone/>
-            </a:pPr>
-            <a:r>
-              <a:rPr lang="en-US" sz="1500" b="1" dirty="0">
-                <a:solidFill>
-                  <a:srgbClr val="2D63FF"/>
-                </a:solidFill>
-                <a:latin typeface="IBM Plex Mono" pitchFamily="34" charset="0"/>
-                <a:ea typeface="IBM Plex Mono" pitchFamily="34" charset="-122"/>
-                <a:cs typeface="IBM Plex Mono" pitchFamily="34" charset="-120"/>
-              </a:rPr>
-              <a:t>[4]</a:t>
-            </a:r>
-            <a:endParaRPr lang="en-US" sz="1500" dirty="0"/>
+            <a:off x="6537960" y="4361688"/>
+            <a:ext cx="4754880" cy="1005840"/>
+          </a:xfrm>
+          <a:prstGeom prst="rect">
+            <a:avLst/>
+          </a:prstGeom>
+          <a:noFill/>
+          <a:ln/>
+        </p:spPr>
+        <p:txBody>
+          <a:bodyPr wrap="square" lIns="0" tIns="0" rIns="0" bIns="0" rtlCol="0" anchor="t"/>
+          <a:lstStyle/>
+          <a:p>
+            <a:pPr indent="0" marL="0">
+              <a:lnSpc>
+                <a:spcPct val="120000"/>
+              </a:lnSpc>
+              <a:buNone/>
+            </a:pPr>
+            <a:r>
+              <a:rPr lang="en-US" sz="1300" dirty="0">
+                <a:solidFill>
+                  <a:srgbClr val="667085"/>
+                </a:solidFill>
+                <a:latin typeface="IBM Plex Sans" pitchFamily="34" charset="0"/>
+                <a:ea typeface="IBM Plex Sans" pitchFamily="34" charset="-122"/>
+                <a:cs typeface="IBM Plex Sans" pitchFamily="34" charset="-120"/>
+              </a:rPr>
+              <a:t>SQL is read by the database in a fixed order: find the table named in FROM, keep only the records that satisfy WHERE, then return the fields listed in SELECT. Knowing that order explains why a query that returns nothing usually has a problem in its WHERE line.</a:t>
+            </a:r>
+            <a:endParaRPr lang="en-US" sz="1300" dirty="0"/>
           </a:p>
         </p:txBody>
       </p:sp>
@@ -4398,6 +4687,604 @@
 <file path=ppt/slides/slide14.xml><?xml version="1.0" encoding="utf-8"?>
 <p:sld xmlns:a="http://schemas.openxmlformats.org/drawingml/2006/main" xmlns:r="http://schemas.openxmlformats.org/officeDocument/2006/relationships" xmlns:p="http://schemas.openxmlformats.org/presentationml/2006/main">
   <p:cSld name="Slide 14">
+    <p:bg>
+      <p:bgPr>
+        <a:solidFill>
+          <a:srgbClr val="F7F7F4"/>
+        </a:solidFill>
+      </p:bgPr>
+    </p:bg>
+    <p:spTree>
+      <p:nvGrpSpPr>
+        <p:cNvPr id="1" name=""/>
+        <p:cNvGrpSpPr/>
+        <p:nvPr/>
+      </p:nvGrpSpPr>
+      <p:grpSpPr>
+        <a:xfrm>
+          <a:off x="0" y="0"/>
+          <a:ext cx="0" cy="0"/>
+          <a:chOff x="0" y="0"/>
+          <a:chExt cx="0" cy="0"/>
+        </a:xfrm>
+      </p:grpSpPr>
+      <p:sp>
+        <p:nvSpPr>
+          <p:cNvPr id="2" name="Shape 0"/>
+          <p:cNvSpPr/>
+          <p:nvPr/>
+        </p:nvSpPr>
+        <p:spPr>
+          <a:xfrm>
+            <a:off x="0" y="0"/>
+            <a:ext cx="12188952" cy="82296"/>
+          </a:xfrm>
+          <a:prstGeom prst="rect">
+            <a:avLst/>
+          </a:prstGeom>
+          <a:solidFill>
+            <a:srgbClr val="2D63FF"/>
+          </a:solidFill>
+          <a:ln/>
+        </p:spPr>
+      </p:sp>
+      <p:sp>
+        <p:nvSpPr>
+          <p:cNvPr id="3" name="Text 1"/>
+          <p:cNvSpPr txBox="1"/>
+          <p:nvPr/>
+        </p:nvSpPr>
+        <p:spPr>
+          <a:xfrm>
+            <a:off x="502920" y="6236208"/>
+            <a:ext cx="7772400" cy="365760"/>
+          </a:xfrm>
+          <a:prstGeom prst="rect">
+            <a:avLst/>
+          </a:prstGeom>
+          <a:noFill/>
+          <a:ln/>
+        </p:spPr>
+        <p:txBody>
+          <a:bodyPr wrap="square" lIns="0" tIns="0" rIns="0" bIns="0" rtlCol="0" anchor="ctr"/>
+          <a:lstStyle/>
+          <a:p>
+            <a:pPr indent="0" marL="0">
+              <a:buNone/>
+            </a:pPr>
+            <a:r>
+              <a:rPr lang="en-US" sz="1100" dirty="0">
+                <a:solidFill>
+                  <a:srgbClr val="667085"/>
+                </a:solidFill>
+                <a:latin typeface="IBM Plex Mono" pitchFamily="34" charset="0"/>
+                <a:ea typeface="IBM Plex Mono" pitchFamily="34" charset="-122"/>
+                <a:cs typeface="IBM Plex Mono" pitchFamily="34" charset="-120"/>
+              </a:rPr>
+              <a:t>2.2 Programming fundamentals  |  Lesson 4</a:t>
+            </a:r>
+            <a:endParaRPr lang="en-US" sz="1100" dirty="0"/>
+          </a:p>
+        </p:txBody>
+      </p:sp>
+      <p:sp>
+        <p:nvSpPr>
+          <p:cNvPr id="4" name="Text 2"/>
+          <p:cNvSpPr txBox="1"/>
+          <p:nvPr/>
+        </p:nvSpPr>
+        <p:spPr>
+          <a:xfrm>
+            <a:off x="9326880" y="6236208"/>
+            <a:ext cx="2377440" cy="365760"/>
+          </a:xfrm>
+          <a:prstGeom prst="rect">
+            <a:avLst/>
+          </a:prstGeom>
+          <a:noFill/>
+          <a:ln/>
+        </p:spPr>
+        <p:txBody>
+          <a:bodyPr wrap="square" lIns="0" tIns="0" rIns="0" bIns="0" rtlCol="0" anchor="ctr"/>
+          <a:lstStyle/>
+          <a:p>
+            <a:pPr algn="r" indent="0" marL="0">
+              <a:buNone/>
+            </a:pPr>
+            <a:r>
+              <a:rPr lang="en-US" sz="1100" dirty="0">
+                <a:solidFill>
+                  <a:srgbClr val="667085"/>
+                </a:solidFill>
+                <a:latin typeface="IBM Plex Mono" pitchFamily="34" charset="0"/>
+                <a:ea typeface="IBM Plex Mono" pitchFamily="34" charset="-122"/>
+                <a:cs typeface="IBM Plex Mono" pitchFamily="34" charset="-120"/>
+              </a:rPr>
+              <a:t>Revise 360</a:t>
+            </a:r>
+            <a:endParaRPr lang="en-US" sz="1100" dirty="0"/>
+          </a:p>
+        </p:txBody>
+      </p:sp>
+      <p:sp>
+        <p:nvSpPr>
+          <p:cNvPr id="5" name="Text 3"/>
+          <p:cNvSpPr txBox="1"/>
+          <p:nvPr/>
+        </p:nvSpPr>
+        <p:spPr>
+          <a:xfrm>
+            <a:off x="502920" y="411480"/>
+            <a:ext cx="11155680" cy="777240"/>
+          </a:xfrm>
+          <a:prstGeom prst="rect">
+            <a:avLst/>
+          </a:prstGeom>
+          <a:noFill/>
+          <a:ln/>
+        </p:spPr>
+        <p:txBody>
+          <a:bodyPr wrap="square" lIns="0" tIns="0" rIns="0" bIns="0" rtlCol="0" anchor="ctr"/>
+          <a:lstStyle/>
+          <a:p>
+            <a:pPr indent="0" marL="0">
+              <a:buNone/>
+            </a:pPr>
+            <a:r>
+              <a:rPr lang="en-US" sz="3200" b="1" dirty="0">
+                <a:solidFill>
+                  <a:srgbClr val="101828"/>
+                </a:solidFill>
+                <a:latin typeface="IBM Plex Sans" pitchFamily="34" charset="0"/>
+                <a:ea typeface="IBM Plex Sans" pitchFamily="34" charset="-122"/>
+                <a:cs typeface="IBM Plex Sans" pitchFamily="34" charset="-120"/>
+              </a:rPr>
+              <a:t>Exam practice</a:t>
+            </a:r>
+            <a:endParaRPr lang="en-US" sz="3200" dirty="0"/>
+          </a:p>
+        </p:txBody>
+      </p:sp>
+      <p:sp>
+        <p:nvSpPr>
+          <p:cNvPr id="6" name="Text 4"/>
+          <p:cNvSpPr txBox="1"/>
+          <p:nvPr/>
+        </p:nvSpPr>
+        <p:spPr>
+          <a:xfrm>
+            <a:off x="502920" y="1170432"/>
+            <a:ext cx="11155680" cy="411480"/>
+          </a:xfrm>
+          <a:prstGeom prst="rect">
+            <a:avLst/>
+          </a:prstGeom>
+          <a:noFill/>
+          <a:ln/>
+        </p:spPr>
+        <p:txBody>
+          <a:bodyPr wrap="square" lIns="0" tIns="0" rIns="0" bIns="0" rtlCol="0" anchor="ctr"/>
+          <a:lstStyle/>
+          <a:p>
+            <a:pPr indent="0" marL="0">
+              <a:buNone/>
+            </a:pPr>
+            <a:r>
+              <a:rPr lang="en-US" sz="1500" dirty="0">
+                <a:solidFill>
+                  <a:srgbClr val="667085"/>
+                </a:solidFill>
+                <a:latin typeface="IBM Plex Sans" pitchFamily="34" charset="0"/>
+                <a:ea typeface="IBM Plex Sans" pitchFamily="34" charset="-122"/>
+                <a:cs typeface="IBM Plex Sans" pitchFamily="34" charset="-120"/>
+              </a:rPr>
+              <a:t>Devices away. Answer from memory on the worksheet.</a:t>
+            </a:r>
+            <a:endParaRPr lang="en-US" sz="1500" dirty="0"/>
+          </a:p>
+        </p:txBody>
+      </p:sp>
+      <p:sp>
+        <p:nvSpPr>
+          <p:cNvPr id="7" name="Shape 5"/>
+          <p:cNvSpPr/>
+          <p:nvPr/>
+        </p:nvSpPr>
+        <p:spPr>
+          <a:xfrm>
+            <a:off x="502920" y="1828800"/>
+            <a:ext cx="11155680" cy="1097280"/>
+          </a:xfrm>
+          <a:prstGeom prst="roundRect">
+            <a:avLst>
+              <a:gd name="adj" fmla="val 10000"/>
+            </a:avLst>
+          </a:prstGeom>
+          <a:solidFill>
+            <a:srgbClr val="FFFFFF"/>
+          </a:solidFill>
+          <a:ln w="15875">
+            <a:solidFill>
+              <a:srgbClr val="D9DEE7"/>
+            </a:solidFill>
+            <a:prstDash val="solid"/>
+          </a:ln>
+        </p:spPr>
+      </p:sp>
+      <p:sp>
+        <p:nvSpPr>
+          <p:cNvPr id="8" name="Text 6"/>
+          <p:cNvSpPr txBox="1"/>
+          <p:nvPr/>
+        </p:nvSpPr>
+        <p:spPr>
+          <a:xfrm>
+            <a:off x="914400" y="1938528"/>
+            <a:ext cx="9418320" cy="877824"/>
+          </a:xfrm>
+          <a:prstGeom prst="rect">
+            <a:avLst/>
+          </a:prstGeom>
+          <a:noFill/>
+          <a:ln/>
+        </p:spPr>
+        <p:txBody>
+          <a:bodyPr wrap="square" lIns="0" tIns="0" rIns="0" bIns="0" rtlCol="0" anchor="ctr"/>
+          <a:lstStyle/>
+          <a:p>
+            <a:pPr indent="0" marL="0">
+              <a:lnSpc>
+                <a:spcPct val="118000"/>
+              </a:lnSpc>
+              <a:buNone/>
+            </a:pPr>
+            <a:r>
+              <a:rPr lang="en-US" sz="1700" dirty="0">
+                <a:solidFill>
+                  <a:srgbClr val="101828"/>
+                </a:solidFill>
+                <a:latin typeface="IBM Plex Sans" pitchFamily="34" charset="0"/>
+                <a:ea typeface="IBM Plex Sans" pitchFamily="34" charset="-122"/>
+                <a:cs typeface="IBM Plex Sans" pitchFamily="34" charset="-120"/>
+              </a:rPr>
+              <a:t>State what is meant by a record and what is meant by a field.</a:t>
+            </a:r>
+            <a:endParaRPr lang="en-US" sz="1700" dirty="0"/>
+          </a:p>
+        </p:txBody>
+      </p:sp>
+      <p:sp>
+        <p:nvSpPr>
+          <p:cNvPr id="9" name="Shape 7"/>
+          <p:cNvSpPr/>
+          <p:nvPr/>
+        </p:nvSpPr>
+        <p:spPr>
+          <a:xfrm>
+            <a:off x="10515600" y="2130552"/>
+            <a:ext cx="868680" cy="493776"/>
+          </a:xfrm>
+          <a:prstGeom prst="roundRect">
+            <a:avLst>
+              <a:gd name="adj" fmla="val 18519"/>
+            </a:avLst>
+          </a:prstGeom>
+          <a:solidFill>
+            <a:srgbClr val="EEF2FB"/>
+          </a:solidFill>
+          <a:ln/>
+        </p:spPr>
+      </p:sp>
+      <p:sp>
+        <p:nvSpPr>
+          <p:cNvPr id="10" name="Text 8"/>
+          <p:cNvSpPr txBox="1"/>
+          <p:nvPr/>
+        </p:nvSpPr>
+        <p:spPr>
+          <a:xfrm>
+            <a:off x="10515600" y="2130552"/>
+            <a:ext cx="868680" cy="493776"/>
+          </a:xfrm>
+          <a:prstGeom prst="rect">
+            <a:avLst/>
+          </a:prstGeom>
+          <a:noFill/>
+          <a:ln/>
+        </p:spPr>
+        <p:txBody>
+          <a:bodyPr wrap="square" lIns="0" tIns="0" rIns="0" bIns="0" rtlCol="0" anchor="ctr"/>
+          <a:lstStyle/>
+          <a:p>
+            <a:pPr algn="ctr" indent="0" marL="0">
+              <a:buNone/>
+            </a:pPr>
+            <a:r>
+              <a:rPr lang="en-US" sz="1500" b="1" dirty="0">
+                <a:solidFill>
+                  <a:srgbClr val="2D63FF"/>
+                </a:solidFill>
+                <a:latin typeface="IBM Plex Mono" pitchFamily="34" charset="0"/>
+                <a:ea typeface="IBM Plex Mono" pitchFamily="34" charset="-122"/>
+                <a:cs typeface="IBM Plex Mono" pitchFamily="34" charset="-120"/>
+              </a:rPr>
+              <a:t>[2]</a:t>
+            </a:r>
+            <a:endParaRPr lang="en-US" sz="1500" dirty="0"/>
+          </a:p>
+        </p:txBody>
+      </p:sp>
+      <p:sp>
+        <p:nvSpPr>
+          <p:cNvPr id="11" name="Shape 9"/>
+          <p:cNvSpPr/>
+          <p:nvPr/>
+        </p:nvSpPr>
+        <p:spPr>
+          <a:xfrm>
+            <a:off x="502920" y="3127248"/>
+            <a:ext cx="11155680" cy="1097280"/>
+          </a:xfrm>
+          <a:prstGeom prst="roundRect">
+            <a:avLst>
+              <a:gd name="adj" fmla="val 10000"/>
+            </a:avLst>
+          </a:prstGeom>
+          <a:solidFill>
+            <a:srgbClr val="FFFFFF"/>
+          </a:solidFill>
+          <a:ln w="15875">
+            <a:solidFill>
+              <a:srgbClr val="D9DEE7"/>
+            </a:solidFill>
+            <a:prstDash val="solid"/>
+          </a:ln>
+        </p:spPr>
+      </p:sp>
+      <p:sp>
+        <p:nvSpPr>
+          <p:cNvPr id="12" name="Text 10"/>
+          <p:cNvSpPr txBox="1"/>
+          <p:nvPr/>
+        </p:nvSpPr>
+        <p:spPr>
+          <a:xfrm>
+            <a:off x="914400" y="3236976"/>
+            <a:ext cx="9418320" cy="877824"/>
+          </a:xfrm>
+          <a:prstGeom prst="rect">
+            <a:avLst/>
+          </a:prstGeom>
+          <a:noFill/>
+          <a:ln/>
+        </p:spPr>
+        <p:txBody>
+          <a:bodyPr wrap="square" lIns="0" tIns="0" rIns="0" bIns="0" rtlCol="0" anchor="ctr"/>
+          <a:lstStyle/>
+          <a:p>
+            <a:pPr indent="0" marL="0">
+              <a:lnSpc>
+                <a:spcPct val="118000"/>
+              </a:lnSpc>
+              <a:buNone/>
+            </a:pPr>
+            <a:r>
+              <a:rPr lang="en-US" sz="1700" dirty="0">
+                <a:solidFill>
+                  <a:srgbClr val="101828"/>
+                </a:solidFill>
+                <a:latin typeface="IBM Plex Sans" pitchFamily="34" charset="0"/>
+                <a:ea typeface="IBM Plex Sans" pitchFamily="34" charset="-122"/>
+                <a:cs typeface="IBM Plex Sans" pitchFamily="34" charset="-120"/>
+              </a:rPr>
+              <a:t>A table called Seeds has the fields SeedID, Name, Family and PacketsLeft. Write an SQL query that returns the name of every seed with fewer than five packets left.</a:t>
+            </a:r>
+            <a:endParaRPr lang="en-US" sz="1700" dirty="0"/>
+          </a:p>
+        </p:txBody>
+      </p:sp>
+      <p:sp>
+        <p:nvSpPr>
+          <p:cNvPr id="13" name="Shape 11"/>
+          <p:cNvSpPr/>
+          <p:nvPr/>
+        </p:nvSpPr>
+        <p:spPr>
+          <a:xfrm>
+            <a:off x="10515600" y="3429000"/>
+            <a:ext cx="868680" cy="493776"/>
+          </a:xfrm>
+          <a:prstGeom prst="roundRect">
+            <a:avLst>
+              <a:gd name="adj" fmla="val 18519"/>
+            </a:avLst>
+          </a:prstGeom>
+          <a:solidFill>
+            <a:srgbClr val="EEF2FB"/>
+          </a:solidFill>
+          <a:ln/>
+        </p:spPr>
+      </p:sp>
+      <p:sp>
+        <p:nvSpPr>
+          <p:cNvPr id="14" name="Text 12"/>
+          <p:cNvSpPr txBox="1"/>
+          <p:nvPr/>
+        </p:nvSpPr>
+        <p:spPr>
+          <a:xfrm>
+            <a:off x="10515600" y="3429000"/>
+            <a:ext cx="868680" cy="493776"/>
+          </a:xfrm>
+          <a:prstGeom prst="rect">
+            <a:avLst/>
+          </a:prstGeom>
+          <a:noFill/>
+          <a:ln/>
+        </p:spPr>
+        <p:txBody>
+          <a:bodyPr wrap="square" lIns="0" tIns="0" rIns="0" bIns="0" rtlCol="0" anchor="ctr"/>
+          <a:lstStyle/>
+          <a:p>
+            <a:pPr algn="ctr" indent="0" marL="0">
+              <a:buNone/>
+            </a:pPr>
+            <a:r>
+              <a:rPr lang="en-US" sz="1500" b="1" dirty="0">
+                <a:solidFill>
+                  <a:srgbClr val="2D63FF"/>
+                </a:solidFill>
+                <a:latin typeface="IBM Plex Mono" pitchFamily="34" charset="0"/>
+                <a:ea typeface="IBM Plex Mono" pitchFamily="34" charset="-122"/>
+                <a:cs typeface="IBM Plex Mono" pitchFamily="34" charset="-120"/>
+              </a:rPr>
+              <a:t>[3]</a:t>
+            </a:r>
+            <a:endParaRPr lang="en-US" sz="1500" dirty="0"/>
+          </a:p>
+        </p:txBody>
+      </p:sp>
+      <p:sp>
+        <p:nvSpPr>
+          <p:cNvPr id="15" name="Shape 13"/>
+          <p:cNvSpPr/>
+          <p:nvPr/>
+        </p:nvSpPr>
+        <p:spPr>
+          <a:xfrm>
+            <a:off x="502920" y="4425696"/>
+            <a:ext cx="11155680" cy="1097280"/>
+          </a:xfrm>
+          <a:prstGeom prst="roundRect">
+            <a:avLst>
+              <a:gd name="adj" fmla="val 10000"/>
+            </a:avLst>
+          </a:prstGeom>
+          <a:solidFill>
+            <a:srgbClr val="FFFFFF"/>
+          </a:solidFill>
+          <a:ln w="15875">
+            <a:solidFill>
+              <a:srgbClr val="D9DEE7"/>
+            </a:solidFill>
+            <a:prstDash val="solid"/>
+          </a:ln>
+        </p:spPr>
+      </p:sp>
+      <p:sp>
+        <p:nvSpPr>
+          <p:cNvPr id="16" name="Text 14"/>
+          <p:cNvSpPr txBox="1"/>
+          <p:nvPr/>
+        </p:nvSpPr>
+        <p:spPr>
+          <a:xfrm>
+            <a:off x="914400" y="4535424"/>
+            <a:ext cx="9418320" cy="877824"/>
+          </a:xfrm>
+          <a:prstGeom prst="rect">
+            <a:avLst/>
+          </a:prstGeom>
+          <a:noFill/>
+          <a:ln/>
+        </p:spPr>
+        <p:txBody>
+          <a:bodyPr wrap="square" lIns="0" tIns="0" rIns="0" bIns="0" rtlCol="0" anchor="ctr"/>
+          <a:lstStyle/>
+          <a:p>
+            <a:pPr indent="0" marL="0">
+              <a:lnSpc>
+                <a:spcPct val="118000"/>
+              </a:lnSpc>
+              <a:buNone/>
+            </a:pPr>
+            <a:r>
+              <a:rPr lang="en-US" sz="1700" dirty="0">
+                <a:solidFill>
+                  <a:srgbClr val="101828"/>
+                </a:solidFill>
+                <a:latin typeface="IBM Plex Sans" pitchFamily="34" charset="0"/>
+                <a:ea typeface="IBM Plex Sans" pitchFamily="34" charset="-122"/>
+                <a:cs typeface="IBM Plex Sans" pitchFamily="34" charset="-120"/>
+              </a:rPr>
+              <a:t>Explain the difference between using AND and using OR in the WHERE line of a query. Use an example of each in your answer.</a:t>
+            </a:r>
+            <a:endParaRPr lang="en-US" sz="1700" dirty="0"/>
+          </a:p>
+        </p:txBody>
+      </p:sp>
+      <p:sp>
+        <p:nvSpPr>
+          <p:cNvPr id="17" name="Shape 15"/>
+          <p:cNvSpPr/>
+          <p:nvPr/>
+        </p:nvSpPr>
+        <p:spPr>
+          <a:xfrm>
+            <a:off x="10515600" y="4727448"/>
+            <a:ext cx="868680" cy="493776"/>
+          </a:xfrm>
+          <a:prstGeom prst="roundRect">
+            <a:avLst>
+              <a:gd name="adj" fmla="val 18519"/>
+            </a:avLst>
+          </a:prstGeom>
+          <a:solidFill>
+            <a:srgbClr val="EEF2FB"/>
+          </a:solidFill>
+          <a:ln/>
+        </p:spPr>
+      </p:sp>
+      <p:sp>
+        <p:nvSpPr>
+          <p:cNvPr id="18" name="Text 16"/>
+          <p:cNvSpPr txBox="1"/>
+          <p:nvPr/>
+        </p:nvSpPr>
+        <p:spPr>
+          <a:xfrm>
+            <a:off x="10515600" y="4727448"/>
+            <a:ext cx="868680" cy="493776"/>
+          </a:xfrm>
+          <a:prstGeom prst="rect">
+            <a:avLst/>
+          </a:prstGeom>
+          <a:noFill/>
+          <a:ln/>
+        </p:spPr>
+        <p:txBody>
+          <a:bodyPr wrap="square" lIns="0" tIns="0" rIns="0" bIns="0" rtlCol="0" anchor="ctr"/>
+          <a:lstStyle/>
+          <a:p>
+            <a:pPr algn="ctr" indent="0" marL="0">
+              <a:buNone/>
+            </a:pPr>
+            <a:r>
+              <a:rPr lang="en-US" sz="1500" b="1" dirty="0">
+                <a:solidFill>
+                  <a:srgbClr val="2D63FF"/>
+                </a:solidFill>
+                <a:latin typeface="IBM Plex Mono" pitchFamily="34" charset="0"/>
+                <a:ea typeface="IBM Plex Mono" pitchFamily="34" charset="-122"/>
+                <a:cs typeface="IBM Plex Mono" pitchFamily="34" charset="-120"/>
+              </a:rPr>
+              <a:t>[4]</a:t>
+            </a:r>
+            <a:endParaRPr lang="en-US" sz="1500" dirty="0"/>
+          </a:p>
+        </p:txBody>
+      </p:sp>
+    </p:spTree>
+  </p:cSld>
+  <p:clrMapOvr>
+    <a:masterClrMapping/>
+  </p:clrMapOvr>
+</p:sld>
+</file>
+
+<file path=ppt/slides/slide15.xml><?xml version="1.0" encoding="utf-8"?>
+<p:sld xmlns:a="http://schemas.openxmlformats.org/drawingml/2006/main" xmlns:r="http://schemas.openxmlformats.org/officeDocument/2006/relationships" xmlns:p="http://schemas.openxmlformats.org/presentationml/2006/main">
+  <p:cSld name="Slide 15">
     <p:bg>
       <p:bgPr>
         <a:solidFill>
